--- a/Research Update.pptx
+++ b/Research Update.pptx
@@ -146,7 +146,7 @@
   <pc:docChgLst>
     <pc:chgData name="Ziqing Liu" userId="20113ce3-4e8c-4eaa-a792-613b3e52886a" providerId="ADAL" clId="{7647F6DA-84E6-4065-910E-AC1B0A07A858}"/>
     <pc:docChg chg="undo custSel addSld delSld modSld sldOrd">
-      <pc:chgData name="Ziqing Liu" userId="20113ce3-4e8c-4eaa-a792-613b3e52886a" providerId="ADAL" clId="{7647F6DA-84E6-4065-910E-AC1B0A07A858}" dt="2026-05-12T07:15:59.870" v="3718" actId="20577"/>
+      <pc:chgData name="Ziqing Liu" userId="20113ce3-4e8c-4eaa-a792-613b3e52886a" providerId="ADAL" clId="{7647F6DA-84E6-4065-910E-AC1B0A07A858}" dt="2026-05-13T00:20:08.505" v="3738" actId="20577"/>
       <pc:docMkLst>
         <pc:docMk/>
       </pc:docMkLst>
@@ -314,7 +314,7 @@
         </pc:spChg>
       </pc:sldChg>
       <pc:sldChg chg="modSp mod modNotesTx">
-        <pc:chgData name="Ziqing Liu" userId="20113ce3-4e8c-4eaa-a792-613b3e52886a" providerId="ADAL" clId="{7647F6DA-84E6-4065-910E-AC1B0A07A858}" dt="2026-05-12T07:12:57.748" v="3680" actId="5793"/>
+        <pc:chgData name="Ziqing Liu" userId="20113ce3-4e8c-4eaa-a792-613b3e52886a" providerId="ADAL" clId="{7647F6DA-84E6-4065-910E-AC1B0A07A858}" dt="2026-05-13T00:20:08.505" v="3738" actId="20577"/>
         <pc:sldMkLst>
           <pc:docMk/>
           <pc:sldMk cId="1684150992" sldId="271"/>
@@ -328,7 +328,7 @@
           </ac:spMkLst>
         </pc:spChg>
         <pc:spChg chg="mod">
-          <ac:chgData name="Ziqing Liu" userId="20113ce3-4e8c-4eaa-a792-613b3e52886a" providerId="ADAL" clId="{7647F6DA-84E6-4065-910E-AC1B0A07A858}" dt="2026-05-12T07:12:57.748" v="3680" actId="5793"/>
+          <ac:chgData name="Ziqing Liu" userId="20113ce3-4e8c-4eaa-a792-613b3e52886a" providerId="ADAL" clId="{7647F6DA-84E6-4065-910E-AC1B0A07A858}" dt="2026-05-13T00:20:08.505" v="3738" actId="20577"/>
           <ac:spMkLst>
             <pc:docMk/>
             <pc:sldMk cId="1684150992" sldId="271"/>
@@ -500,7 +500,7 @@
           <a:p>
             <a:fld id="{3EEF466A-A959-4E0E-8024-BDD72A80DBF2}" type="datetimeFigureOut">
               <a:rPr lang="en-AU" smtClean="0"/>
-              <a:t>12/05/2026</a:t>
+              <a:t>13/05/2026</a:t>
             </a:fld>
             <a:endParaRPr lang="en-AU"/>
           </a:p>
@@ -2669,7 +2669,7 @@
           <a:p>
             <a:fld id="{E7611B22-EA13-474B-83BA-8A12F66AADAF}" type="datetimeFigureOut">
               <a:rPr lang="en-AU" smtClean="0"/>
-              <a:t>12/05/2026</a:t>
+              <a:t>13/05/2026</a:t>
             </a:fld>
             <a:endParaRPr lang="en-AU"/>
           </a:p>
@@ -2904,7 +2904,7 @@
           <a:p>
             <a:fld id="{E7611B22-EA13-474B-83BA-8A12F66AADAF}" type="datetimeFigureOut">
               <a:rPr lang="en-AU" smtClean="0"/>
-              <a:t>12/05/2026</a:t>
+              <a:t>13/05/2026</a:t>
             </a:fld>
             <a:endParaRPr lang="en-AU"/>
           </a:p>
@@ -3084,7 +3084,7 @@
           <a:p>
             <a:fld id="{E7611B22-EA13-474B-83BA-8A12F66AADAF}" type="datetimeFigureOut">
               <a:rPr lang="en-AU" smtClean="0"/>
-              <a:t>12/05/2026</a:t>
+              <a:t>13/05/2026</a:t>
             </a:fld>
             <a:endParaRPr lang="en-AU"/>
           </a:p>
@@ -3254,7 +3254,7 @@
           <a:p>
             <a:fld id="{E7611B22-EA13-474B-83BA-8A12F66AADAF}" type="datetimeFigureOut">
               <a:rPr lang="en-AU" smtClean="0"/>
-              <a:t>12/05/2026</a:t>
+              <a:t>13/05/2026</a:t>
             </a:fld>
             <a:endParaRPr lang="en-AU"/>
           </a:p>
@@ -3508,7 +3508,7 @@
           <a:p>
             <a:fld id="{E7611B22-EA13-474B-83BA-8A12F66AADAF}" type="datetimeFigureOut">
               <a:rPr lang="en-AU" smtClean="0"/>
-              <a:t>12/05/2026</a:t>
+              <a:t>13/05/2026</a:t>
             </a:fld>
             <a:endParaRPr lang="en-AU"/>
           </a:p>
@@ -3834,7 +3834,7 @@
           <a:p>
             <a:fld id="{E7611B22-EA13-474B-83BA-8A12F66AADAF}" type="datetimeFigureOut">
               <a:rPr lang="en-AU" smtClean="0"/>
-              <a:t>12/05/2026</a:t>
+              <a:t>13/05/2026</a:t>
             </a:fld>
             <a:endParaRPr lang="en-AU"/>
           </a:p>
@@ -4285,7 +4285,7 @@
           <a:p>
             <a:fld id="{E7611B22-EA13-474B-83BA-8A12F66AADAF}" type="datetimeFigureOut">
               <a:rPr lang="en-AU" smtClean="0"/>
-              <a:t>12/05/2026</a:t>
+              <a:t>13/05/2026</a:t>
             </a:fld>
             <a:endParaRPr lang="en-AU"/>
           </a:p>
@@ -4403,7 +4403,7 @@
           <a:p>
             <a:fld id="{E7611B22-EA13-474B-83BA-8A12F66AADAF}" type="datetimeFigureOut">
               <a:rPr lang="en-AU" smtClean="0"/>
-              <a:t>12/05/2026</a:t>
+              <a:t>13/05/2026</a:t>
             </a:fld>
             <a:endParaRPr lang="en-AU"/>
           </a:p>
@@ -4498,7 +4498,7 @@
           <a:p>
             <a:fld id="{E7611B22-EA13-474B-83BA-8A12F66AADAF}" type="datetimeFigureOut">
               <a:rPr lang="en-AU" smtClean="0"/>
-              <a:t>12/05/2026</a:t>
+              <a:t>13/05/2026</a:t>
             </a:fld>
             <a:endParaRPr lang="en-AU"/>
           </a:p>
@@ -4785,7 +4785,7 @@
           <a:p>
             <a:fld id="{E7611B22-EA13-474B-83BA-8A12F66AADAF}" type="datetimeFigureOut">
               <a:rPr lang="en-AU" smtClean="0"/>
-              <a:t>12/05/2026</a:t>
+              <a:t>13/05/2026</a:t>
             </a:fld>
             <a:endParaRPr lang="en-AU"/>
           </a:p>
@@ -5107,7 +5107,7 @@
           <a:p>
             <a:fld id="{E7611B22-EA13-474B-83BA-8A12F66AADAF}" type="datetimeFigureOut">
               <a:rPr lang="en-AU" smtClean="0"/>
-              <a:t>12/05/2026</a:t>
+              <a:t>13/05/2026</a:t>
             </a:fld>
             <a:endParaRPr lang="en-AU"/>
           </a:p>
@@ -5368,7 +5368,7 @@
           <a:p>
             <a:fld id="{E7611B22-EA13-474B-83BA-8A12F66AADAF}" type="datetimeFigureOut">
               <a:rPr lang="en-AU" smtClean="0"/>
-              <a:t>12/05/2026</a:t>
+              <a:t>13/05/2026</a:t>
             </a:fld>
             <a:endParaRPr lang="en-AU"/>
           </a:p>
@@ -6688,11 +6688,15 @@
           <a:p>
             <a:r>
               <a:rPr lang="en-US" dirty="0"/>
-              <a:t>There is an uneven distribution of mutations that we see,</a:t>
+              <a:t>There is an uneven distribution of mutations. </a:t>
+            </a:r>
+            <a:r>
+              <a:rPr lang="en-AU"/>
+              <a:t>Results </a:t>
             </a:r>
             <a:r>
               <a:rPr lang="en-AU" dirty="0"/>
-              <a:t> results from the E. coli, A. </a:t>
+              <a:t>from the E. coli, A. </a:t>
             </a:r>
             <a:r>
               <a:rPr lang="en-AU" dirty="0" err="1"/>

--- a/Research Update.pptx
+++ b/Research Update.pptx
@@ -5,7 +5,7 @@
     <p:sldMasterId id="2147483660" r:id="rId1"/>
   </p:sldMasterIdLst>
   <p:notesMasterIdLst>
-    <p:notesMasterId r:id="rId21"/>
+    <p:notesMasterId r:id="rId22"/>
   </p:notesMasterIdLst>
   <p:sldIdLst>
     <p:sldId id="256" r:id="rId2"/>
@@ -18,15 +18,16 @@
     <p:sldId id="263" r:id="rId9"/>
     <p:sldId id="264" r:id="rId10"/>
     <p:sldId id="269" r:id="rId11"/>
-    <p:sldId id="265" r:id="rId12"/>
-    <p:sldId id="266" r:id="rId13"/>
-    <p:sldId id="267" r:id="rId14"/>
-    <p:sldId id="268" r:id="rId15"/>
-    <p:sldId id="270" r:id="rId16"/>
-    <p:sldId id="271" r:id="rId17"/>
-    <p:sldId id="272" r:id="rId18"/>
-    <p:sldId id="273" r:id="rId19"/>
-    <p:sldId id="277" r:id="rId20"/>
+    <p:sldId id="270" r:id="rId12"/>
+    <p:sldId id="271" r:id="rId13"/>
+    <p:sldId id="272" r:id="rId14"/>
+    <p:sldId id="273" r:id="rId15"/>
+    <p:sldId id="277" r:id="rId16"/>
+    <p:sldId id="278" r:id="rId17"/>
+    <p:sldId id="265" r:id="rId18"/>
+    <p:sldId id="266" r:id="rId19"/>
+    <p:sldId id="267" r:id="rId20"/>
+    <p:sldId id="268" r:id="rId21"/>
   </p:sldIdLst>
   <p:sldSz cx="12192000" cy="6858000"/>
   <p:notesSz cx="6858000" cy="9144000"/>
@@ -136,7 +137,7 @@
 <file path=ppt/revisionInfo.xml><?xml version="1.0" encoding="utf-8"?>
 <p1510:revInfo xmlns:a="http://schemas.openxmlformats.org/drawingml/2006/main" xmlns:r="http://schemas.openxmlformats.org/officeDocument/2006/relationships" xmlns:p1510="http://schemas.microsoft.com/office/powerpoint/2015/10/main">
   <p1510:revLst>
-    <p1510:client id="{2E6FB4F6-F798-4ED9-99E3-1574F431BF44}" v="3" dt="2026-05-12T07:16:00.824"/>
+    <p1510:client id="{2E6FB4F6-F798-4ED9-99E3-1574F431BF44}" v="8" dt="2026-05-15T02:53:56.506"/>
   </p1510:revLst>
 </p1510:revInfo>
 </file>
@@ -146,19 +147,27 @@
   <pc:docChgLst>
     <pc:chgData name="Ziqing Liu" userId="20113ce3-4e8c-4eaa-a792-613b3e52886a" providerId="ADAL" clId="{7647F6DA-84E6-4065-910E-AC1B0A07A858}"/>
     <pc:docChg chg="undo custSel addSld delSld modSld sldOrd">
-      <pc:chgData name="Ziqing Liu" userId="20113ce3-4e8c-4eaa-a792-613b3e52886a" providerId="ADAL" clId="{7647F6DA-84E6-4065-910E-AC1B0A07A858}" dt="2026-05-13T00:20:08.505" v="3738" actId="20577"/>
+      <pc:chgData name="Ziqing Liu" userId="20113ce3-4e8c-4eaa-a792-613b3e52886a" providerId="ADAL" clId="{7647F6DA-84E6-4065-910E-AC1B0A07A858}" dt="2026-05-15T03:39:42.724" v="4927" actId="20577"/>
       <pc:docMkLst>
         <pc:docMk/>
       </pc:docMkLst>
-      <pc:sldChg chg="modNotesTx">
-        <pc:chgData name="Ziqing Liu" userId="20113ce3-4e8c-4eaa-a792-613b3e52886a" providerId="ADAL" clId="{7647F6DA-84E6-4065-910E-AC1B0A07A858}" dt="2026-04-30T06:11:44.363" v="978" actId="20577"/>
+      <pc:sldChg chg="modSp mod modNotesTx">
+        <pc:chgData name="Ziqing Liu" userId="20113ce3-4e8c-4eaa-a792-613b3e52886a" providerId="ADAL" clId="{7647F6DA-84E6-4065-910E-AC1B0A07A858}" dt="2026-05-15T02:53:03.248" v="4549" actId="20577"/>
         <pc:sldMkLst>
           <pc:docMk/>
           <pc:sldMk cId="2040666385" sldId="257"/>
         </pc:sldMkLst>
+        <pc:spChg chg="mod">
+          <ac:chgData name="Ziqing Liu" userId="20113ce3-4e8c-4eaa-a792-613b3e52886a" providerId="ADAL" clId="{7647F6DA-84E6-4065-910E-AC1B0A07A858}" dt="2026-05-15T02:53:03.248" v="4549" actId="20577"/>
+          <ac:spMkLst>
+            <pc:docMk/>
+            <pc:sldMk cId="2040666385" sldId="257"/>
+            <ac:spMk id="3" creationId="{CA4F29F4-AEB2-D0FB-3CE6-20070AD29B70}"/>
+          </ac:spMkLst>
+        </pc:spChg>
       </pc:sldChg>
       <pc:sldChg chg="modSp mod modNotesTx">
-        <pc:chgData name="Ziqing Liu" userId="20113ce3-4e8c-4eaa-a792-613b3e52886a" providerId="ADAL" clId="{7647F6DA-84E6-4065-910E-AC1B0A07A858}" dt="2026-05-01T03:28:55.049" v="3389" actId="20577"/>
+        <pc:chgData name="Ziqing Liu" userId="20113ce3-4e8c-4eaa-a792-613b3e52886a" providerId="ADAL" clId="{7647F6DA-84E6-4065-910E-AC1B0A07A858}" dt="2026-05-15T03:32:25.240" v="4885" actId="20577"/>
         <pc:sldMkLst>
           <pc:docMk/>
           <pc:sldMk cId="3571827075" sldId="258"/>
@@ -173,13 +182,13 @@
         </pc:spChg>
       </pc:sldChg>
       <pc:sldChg chg="modSp mod modNotesTx">
-        <pc:chgData name="Ziqing Liu" userId="20113ce3-4e8c-4eaa-a792-613b3e52886a" providerId="ADAL" clId="{7647F6DA-84E6-4065-910E-AC1B0A07A858}" dt="2026-05-01T03:05:46.001" v="3309" actId="20577"/>
+        <pc:chgData name="Ziqing Liu" userId="20113ce3-4e8c-4eaa-a792-613b3e52886a" providerId="ADAL" clId="{7647F6DA-84E6-4065-910E-AC1B0A07A858}" dt="2026-05-15T03:30:11.186" v="4850" actId="20577"/>
         <pc:sldMkLst>
           <pc:docMk/>
           <pc:sldMk cId="1452976489" sldId="259"/>
         </pc:sldMkLst>
         <pc:spChg chg="mod">
-          <ac:chgData name="Ziqing Liu" userId="20113ce3-4e8c-4eaa-a792-613b3e52886a" providerId="ADAL" clId="{7647F6DA-84E6-4065-910E-AC1B0A07A858}" dt="2026-05-01T03:05:46.001" v="3309" actId="20577"/>
+          <ac:chgData name="Ziqing Liu" userId="20113ce3-4e8c-4eaa-a792-613b3e52886a" providerId="ADAL" clId="{7647F6DA-84E6-4065-910E-AC1B0A07A858}" dt="2026-05-15T02:52:44.975" v="4545"/>
           <ac:spMkLst>
             <pc:docMk/>
             <pc:sldMk cId="1452976489" sldId="259"/>
@@ -188,7 +197,7 @@
         </pc:spChg>
       </pc:sldChg>
       <pc:sldChg chg="modNotesTx">
-        <pc:chgData name="Ziqing Liu" userId="20113ce3-4e8c-4eaa-a792-613b3e52886a" providerId="ADAL" clId="{7647F6DA-84E6-4065-910E-AC1B0A07A858}" dt="2026-04-30T06:16:50.993" v="1497" actId="20577"/>
+        <pc:chgData name="Ziqing Liu" userId="20113ce3-4e8c-4eaa-a792-613b3e52886a" providerId="ADAL" clId="{7647F6DA-84E6-4065-910E-AC1B0A07A858}" dt="2026-05-15T02:59:54.303" v="4559" actId="20577"/>
         <pc:sldMkLst>
           <pc:docMk/>
           <pc:sldMk cId="1532048993" sldId="260"/>
@@ -201,15 +210,23 @@
           <pc:sldMk cId="559528190" sldId="261"/>
         </pc:sldMkLst>
       </pc:sldChg>
-      <pc:sldChg chg="modNotesTx">
-        <pc:chgData name="Ziqing Liu" userId="20113ce3-4e8c-4eaa-a792-613b3e52886a" providerId="ADAL" clId="{7647F6DA-84E6-4065-910E-AC1B0A07A858}" dt="2026-04-30T06:17:35.774" v="1605" actId="20577"/>
+      <pc:sldChg chg="modSp mod modNotesTx">
+        <pc:chgData name="Ziqing Liu" userId="20113ce3-4e8c-4eaa-a792-613b3e52886a" providerId="ADAL" clId="{7647F6DA-84E6-4065-910E-AC1B0A07A858}" dt="2026-05-15T02:52:03.622" v="4544" actId="20577"/>
         <pc:sldMkLst>
           <pc:docMk/>
           <pc:sldMk cId="3839789162" sldId="262"/>
         </pc:sldMkLst>
+        <pc:spChg chg="mod">
+          <ac:chgData name="Ziqing Liu" userId="20113ce3-4e8c-4eaa-a792-613b3e52886a" providerId="ADAL" clId="{7647F6DA-84E6-4065-910E-AC1B0A07A858}" dt="2026-05-15T02:52:03.622" v="4544" actId="20577"/>
+          <ac:spMkLst>
+            <pc:docMk/>
+            <pc:sldMk cId="3839789162" sldId="262"/>
+            <ac:spMk id="3" creationId="{DE2C9C34-887F-533A-DB17-2DDA04692945}"/>
+          </ac:spMkLst>
+        </pc:spChg>
       </pc:sldChg>
-      <pc:sldChg chg="modSp mod">
-        <pc:chgData name="Ziqing Liu" userId="20113ce3-4e8c-4eaa-a792-613b3e52886a" providerId="ADAL" clId="{7647F6DA-84E6-4065-910E-AC1B0A07A858}" dt="2026-04-30T06:18:56.984" v="1610" actId="14100"/>
+      <pc:sldChg chg="modSp mod modNotesTx">
+        <pc:chgData name="Ziqing Liu" userId="20113ce3-4e8c-4eaa-a792-613b3e52886a" providerId="ADAL" clId="{7647F6DA-84E6-4065-910E-AC1B0A07A858}" dt="2026-05-15T00:24:38.783" v="3931" actId="20577"/>
         <pc:sldMkLst>
           <pc:docMk/>
           <pc:sldMk cId="3719714297" sldId="263"/>
@@ -223,8 +240,15 @@
           </ac:picMkLst>
         </pc:picChg>
       </pc:sldChg>
-      <pc:sldChg chg="modSp mod modNotesTx">
-        <pc:chgData name="Ziqing Liu" userId="20113ce3-4e8c-4eaa-a792-613b3e52886a" providerId="ADAL" clId="{7647F6DA-84E6-4065-910E-AC1B0A07A858}" dt="2026-05-01T02:56:03.269" v="2862" actId="20577"/>
+      <pc:sldChg chg="modNotesTx">
+        <pc:chgData name="Ziqing Liu" userId="20113ce3-4e8c-4eaa-a792-613b3e52886a" providerId="ADAL" clId="{7647F6DA-84E6-4065-910E-AC1B0A07A858}" dt="2026-05-15T00:25:20.559" v="3968" actId="20577"/>
+        <pc:sldMkLst>
+          <pc:docMk/>
+          <pc:sldMk cId="4160441594" sldId="264"/>
+        </pc:sldMkLst>
+      </pc:sldChg>
+      <pc:sldChg chg="modSp mod ord modNotesTx">
+        <pc:chgData name="Ziqing Liu" userId="20113ce3-4e8c-4eaa-a792-613b3e52886a" providerId="ADAL" clId="{7647F6DA-84E6-4065-910E-AC1B0A07A858}" dt="2026-05-15T03:23:08.659" v="4786"/>
         <pc:sldMkLst>
           <pc:docMk/>
           <pc:sldMk cId="1820470890" sldId="265"/>
@@ -238,8 +262,8 @@
           </ac:spMkLst>
         </pc:spChg>
       </pc:sldChg>
-      <pc:sldChg chg="modSp mod">
-        <pc:chgData name="Ziqing Liu" userId="20113ce3-4e8c-4eaa-a792-613b3e52886a" providerId="ADAL" clId="{7647F6DA-84E6-4065-910E-AC1B0A07A858}" dt="2026-04-30T01:24:09.434" v="521" actId="20577"/>
+      <pc:sldChg chg="modSp mod ord">
+        <pc:chgData name="Ziqing Liu" userId="20113ce3-4e8c-4eaa-a792-613b3e52886a" providerId="ADAL" clId="{7647F6DA-84E6-4065-910E-AC1B0A07A858}" dt="2026-05-15T03:23:12.025" v="4788"/>
         <pc:sldMkLst>
           <pc:docMk/>
           <pc:sldMk cId="4088449915" sldId="266"/>
@@ -253,8 +277,8 @@
           </ac:spMkLst>
         </pc:spChg>
       </pc:sldChg>
-      <pc:sldChg chg="modSp mod">
-        <pc:chgData name="Ziqing Liu" userId="20113ce3-4e8c-4eaa-a792-613b3e52886a" providerId="ADAL" clId="{7647F6DA-84E6-4065-910E-AC1B0A07A858}" dt="2026-04-30T01:24:15.284" v="527" actId="20577"/>
+      <pc:sldChg chg="modSp mod ord">
+        <pc:chgData name="Ziqing Liu" userId="20113ce3-4e8c-4eaa-a792-613b3e52886a" providerId="ADAL" clId="{7647F6DA-84E6-4065-910E-AC1B0A07A858}" dt="2026-05-15T03:23:16.033" v="4790"/>
         <pc:sldMkLst>
           <pc:docMk/>
           <pc:sldMk cId="1775554001" sldId="267"/>
@@ -269,7 +293,7 @@
         </pc:spChg>
       </pc:sldChg>
       <pc:sldChg chg="modSp mod ord">
-        <pc:chgData name="Ziqing Liu" userId="20113ce3-4e8c-4eaa-a792-613b3e52886a" providerId="ADAL" clId="{7647F6DA-84E6-4065-910E-AC1B0A07A858}" dt="2026-04-30T01:24:20.987" v="533" actId="20577"/>
+        <pc:chgData name="Ziqing Liu" userId="20113ce3-4e8c-4eaa-a792-613b3e52886a" providerId="ADAL" clId="{7647F6DA-84E6-4065-910E-AC1B0A07A858}" dt="2026-05-15T03:23:19.232" v="4792"/>
         <pc:sldMkLst>
           <pc:docMk/>
           <pc:sldMk cId="446253618" sldId="268"/>
@@ -283,29 +307,37 @@
           </ac:spMkLst>
         </pc:spChg>
       </pc:sldChg>
-      <pc:sldChg chg="modSp mod modNotesTx">
-        <pc:chgData name="Ziqing Liu" userId="20113ce3-4e8c-4eaa-a792-613b3e52886a" providerId="ADAL" clId="{7647F6DA-84E6-4065-910E-AC1B0A07A858}" dt="2026-05-12T07:15:59.870" v="3718" actId="20577"/>
+      <pc:sldChg chg="addSp delSp modSp mod modNotesTx">
+        <pc:chgData name="Ziqing Liu" userId="20113ce3-4e8c-4eaa-a792-613b3e52886a" providerId="ADAL" clId="{7647F6DA-84E6-4065-910E-AC1B0A07A858}" dt="2026-05-15T03:39:42.724" v="4927" actId="20577"/>
         <pc:sldMkLst>
           <pc:docMk/>
           <pc:sldMk cId="3308895348" sldId="269"/>
         </pc:sldMkLst>
         <pc:spChg chg="mod">
-          <ac:chgData name="Ziqing Liu" userId="20113ce3-4e8c-4eaa-a792-613b3e52886a" providerId="ADAL" clId="{7647F6DA-84E6-4065-910E-AC1B0A07A858}" dt="2026-05-01T03:06:17.439" v="3311" actId="20577"/>
+          <ac:chgData name="Ziqing Liu" userId="20113ce3-4e8c-4eaa-a792-613b3e52886a" providerId="ADAL" clId="{7647F6DA-84E6-4065-910E-AC1B0A07A858}" dt="2026-05-15T00:25:54.280" v="3982" actId="20577"/>
           <ac:spMkLst>
             <pc:docMk/>
             <pc:sldMk cId="3308895348" sldId="269"/>
             <ac:spMk id="3" creationId="{75CEAE73-A454-A5D9-BF0B-1BC190E98C83}"/>
           </ac:spMkLst>
         </pc:spChg>
+        <pc:picChg chg="add del">
+          <ac:chgData name="Ziqing Liu" userId="20113ce3-4e8c-4eaa-a792-613b3e52886a" providerId="ADAL" clId="{7647F6DA-84E6-4065-910E-AC1B0A07A858}" dt="2026-05-15T03:37:28.985" v="4887" actId="478"/>
+          <ac:picMkLst>
+            <pc:docMk/>
+            <pc:sldMk cId="3308895348" sldId="269"/>
+            <ac:picMk id="5" creationId="{FDB2D665-709B-BCFF-2936-15477C7D5B8D}"/>
+          </ac:picMkLst>
+        </pc:picChg>
       </pc:sldChg>
       <pc:sldChg chg="modSp mod">
-        <pc:chgData name="Ziqing Liu" userId="20113ce3-4e8c-4eaa-a792-613b3e52886a" providerId="ADAL" clId="{7647F6DA-84E6-4065-910E-AC1B0A07A858}" dt="2026-05-01T02:42:20.047" v="2238" actId="20577"/>
+        <pc:chgData name="Ziqing Liu" userId="20113ce3-4e8c-4eaa-a792-613b3e52886a" providerId="ADAL" clId="{7647F6DA-84E6-4065-910E-AC1B0A07A858}" dt="2026-05-15T00:45:04.638" v="4343" actId="20577"/>
         <pc:sldMkLst>
           <pc:docMk/>
           <pc:sldMk cId="2551635289" sldId="270"/>
         </pc:sldMkLst>
         <pc:spChg chg="mod">
-          <ac:chgData name="Ziqing Liu" userId="20113ce3-4e8c-4eaa-a792-613b3e52886a" providerId="ADAL" clId="{7647F6DA-84E6-4065-910E-AC1B0A07A858}" dt="2026-05-01T02:42:20.047" v="2238" actId="20577"/>
+          <ac:chgData name="Ziqing Liu" userId="20113ce3-4e8c-4eaa-a792-613b3e52886a" providerId="ADAL" clId="{7647F6DA-84E6-4065-910E-AC1B0A07A858}" dt="2026-05-15T00:45:04.638" v="4343" actId="20577"/>
           <ac:spMkLst>
             <pc:docMk/>
             <pc:sldMk cId="2551635289" sldId="270"/>
@@ -314,7 +346,7 @@
         </pc:spChg>
       </pc:sldChg>
       <pc:sldChg chg="modSp mod modNotesTx">
-        <pc:chgData name="Ziqing Liu" userId="20113ce3-4e8c-4eaa-a792-613b3e52886a" providerId="ADAL" clId="{7647F6DA-84E6-4065-910E-AC1B0A07A858}" dt="2026-05-13T00:20:08.505" v="3738" actId="20577"/>
+        <pc:chgData name="Ziqing Liu" userId="20113ce3-4e8c-4eaa-a792-613b3e52886a" providerId="ADAL" clId="{7647F6DA-84E6-4065-910E-AC1B0A07A858}" dt="2026-05-15T03:14:22.569" v="4770" actId="20577"/>
         <pc:sldMkLst>
           <pc:docMk/>
           <pc:sldMk cId="1684150992" sldId="271"/>
@@ -328,7 +360,7 @@
           </ac:spMkLst>
         </pc:spChg>
         <pc:spChg chg="mod">
-          <ac:chgData name="Ziqing Liu" userId="20113ce3-4e8c-4eaa-a792-613b3e52886a" providerId="ADAL" clId="{7647F6DA-84E6-4065-910E-AC1B0A07A858}" dt="2026-05-13T00:20:08.505" v="3738" actId="20577"/>
+          <ac:chgData name="Ziqing Liu" userId="20113ce3-4e8c-4eaa-a792-613b3e52886a" providerId="ADAL" clId="{7647F6DA-84E6-4065-910E-AC1B0A07A858}" dt="2026-05-15T03:13:29.107" v="4756" actId="20577"/>
           <ac:spMkLst>
             <pc:docMk/>
             <pc:sldMk cId="1684150992" sldId="271"/>
@@ -337,13 +369,13 @@
         </pc:spChg>
       </pc:sldChg>
       <pc:sldChg chg="addSp modSp mod modNotesTx">
-        <pc:chgData name="Ziqing Liu" userId="20113ce3-4e8c-4eaa-a792-613b3e52886a" providerId="ADAL" clId="{7647F6DA-84E6-4065-910E-AC1B0A07A858}" dt="2026-05-01T03:06:52.840" v="3321" actId="20577"/>
+        <pc:chgData name="Ziqing Liu" userId="20113ce3-4e8c-4eaa-a792-613b3e52886a" providerId="ADAL" clId="{7647F6DA-84E6-4065-910E-AC1B0A07A858}" dt="2026-05-15T03:14:39.006" v="4784" actId="20577"/>
         <pc:sldMkLst>
           <pc:docMk/>
           <pc:sldMk cId="4135181532" sldId="272"/>
         </pc:sldMkLst>
         <pc:spChg chg="mod">
-          <ac:chgData name="Ziqing Liu" userId="20113ce3-4e8c-4eaa-a792-613b3e52886a" providerId="ADAL" clId="{7647F6DA-84E6-4065-910E-AC1B0A07A858}" dt="2026-05-01T03:06:52.840" v="3321" actId="20577"/>
+          <ac:chgData name="Ziqing Liu" userId="20113ce3-4e8c-4eaa-a792-613b3e52886a" providerId="ADAL" clId="{7647F6DA-84E6-4065-910E-AC1B0A07A858}" dt="2026-05-15T03:14:39.006" v="4784" actId="20577"/>
           <ac:spMkLst>
             <pc:docMk/>
             <pc:sldMk cId="4135181532" sldId="272"/>
@@ -360,7 +392,7 @@
         </pc:picChg>
       </pc:sldChg>
       <pc:sldChg chg="addSp delSp modSp mod modNotesTx">
-        <pc:chgData name="Ziqing Liu" userId="20113ce3-4e8c-4eaa-a792-613b3e52886a" providerId="ADAL" clId="{7647F6DA-84E6-4065-910E-AC1B0A07A858}" dt="2026-05-12T07:14:47.983" v="3711" actId="20577"/>
+        <pc:chgData name="Ziqing Liu" userId="20113ce3-4e8c-4eaa-a792-613b3e52886a" providerId="ADAL" clId="{7647F6DA-84E6-4065-910E-AC1B0A07A858}" dt="2026-05-15T02:39:03.742" v="4481" actId="20577"/>
         <pc:sldMkLst>
           <pc:docMk/>
           <pc:sldMk cId="161381395" sldId="273"/>
@@ -373,30 +405,6 @@
             <ac:spMk id="2" creationId="{B18E2FA7-3528-B5F6-DCC3-6380A3F928B8}"/>
           </ac:spMkLst>
         </pc:spChg>
-        <pc:spChg chg="add del mod">
-          <ac:chgData name="Ziqing Liu" userId="20113ce3-4e8c-4eaa-a792-613b3e52886a" providerId="ADAL" clId="{7647F6DA-84E6-4065-910E-AC1B0A07A858}" dt="2026-05-12T07:14:28.874" v="3684"/>
-          <ac:spMkLst>
-            <pc:docMk/>
-            <pc:sldMk cId="161381395" sldId="273"/>
-            <ac:spMk id="4" creationId="{6BA039DC-B37E-8045-53DB-770B04AF2189}"/>
-          </ac:spMkLst>
-        </pc:spChg>
-        <pc:picChg chg="add del mod ord">
-          <ac:chgData name="Ziqing Liu" userId="20113ce3-4e8c-4eaa-a792-613b3e52886a" providerId="ADAL" clId="{7647F6DA-84E6-4065-910E-AC1B0A07A858}" dt="2026-05-12T07:14:26.285" v="3681" actId="478"/>
-          <ac:picMkLst>
-            <pc:docMk/>
-            <pc:sldMk cId="161381395" sldId="273"/>
-            <ac:picMk id="5" creationId="{BE7C069A-95D2-3FAE-BBC5-44E21A62F67B}"/>
-          </ac:picMkLst>
-        </pc:picChg>
-        <pc:picChg chg="add del mod">
-          <ac:chgData name="Ziqing Liu" userId="20113ce3-4e8c-4eaa-a792-613b3e52886a" providerId="ADAL" clId="{7647F6DA-84E6-4065-910E-AC1B0A07A858}" dt="2026-05-12T07:14:27.587" v="3682" actId="478"/>
-          <ac:picMkLst>
-            <pc:docMk/>
-            <pc:sldMk cId="161381395" sldId="273"/>
-            <ac:picMk id="7" creationId="{AE4623AB-D728-CE76-5F3B-F9CF9CF88544}"/>
-          </ac:picMkLst>
-        </pc:picChg>
         <pc:picChg chg="add mod ord">
           <ac:chgData name="Ziqing Liu" userId="20113ce3-4e8c-4eaa-a792-613b3e52886a" providerId="ADAL" clId="{7647F6DA-84E6-4065-910E-AC1B0A07A858}" dt="2026-05-12T07:14:38.599" v="3687" actId="1076"/>
           <ac:picMkLst>
@@ -406,12 +414,59 @@
           </ac:picMkLst>
         </pc:picChg>
       </pc:sldChg>
-      <pc:sldChg chg="new">
-        <pc:chgData name="Ziqing Liu" userId="20113ce3-4e8c-4eaa-a792-613b3e52886a" providerId="ADAL" clId="{7647F6DA-84E6-4065-910E-AC1B0A07A858}" dt="2026-05-01T02:18:54.361" v="2228" actId="680"/>
+      <pc:sldChg chg="addSp modSp new mod modNotesTx">
+        <pc:chgData name="Ziqing Liu" userId="20113ce3-4e8c-4eaa-a792-613b3e52886a" providerId="ADAL" clId="{7647F6DA-84E6-4065-910E-AC1B0A07A858}" dt="2026-05-15T00:49:09.742" v="4480" actId="20577"/>
         <pc:sldMkLst>
           <pc:docMk/>
           <pc:sldMk cId="553690055" sldId="277"/>
         </pc:sldMkLst>
+        <pc:spChg chg="mod">
+          <ac:chgData name="Ziqing Liu" userId="20113ce3-4e8c-4eaa-a792-613b3e52886a" providerId="ADAL" clId="{7647F6DA-84E6-4065-910E-AC1B0A07A858}" dt="2026-05-15T00:48:33.265" v="4466" actId="20577"/>
+          <ac:spMkLst>
+            <pc:docMk/>
+            <pc:sldMk cId="553690055" sldId="277"/>
+            <ac:spMk id="2" creationId="{1CB5020F-9C20-B7A9-E41A-55AAE3D5476A}"/>
+          </ac:spMkLst>
+        </pc:spChg>
+        <pc:spChg chg="mod">
+          <ac:chgData name="Ziqing Liu" userId="20113ce3-4e8c-4eaa-a792-613b3e52886a" providerId="ADAL" clId="{7647F6DA-84E6-4065-910E-AC1B0A07A858}" dt="2026-05-15T00:41:27.699" v="4266" actId="20577"/>
+          <ac:spMkLst>
+            <pc:docMk/>
+            <pc:sldMk cId="553690055" sldId="277"/>
+            <ac:spMk id="3" creationId="{DEB5D11C-73B4-CF12-50B3-6C4805004ADA}"/>
+          </ac:spMkLst>
+        </pc:spChg>
+        <pc:picChg chg="add mod">
+          <ac:chgData name="Ziqing Liu" userId="20113ce3-4e8c-4eaa-a792-613b3e52886a" providerId="ADAL" clId="{7647F6DA-84E6-4065-910E-AC1B0A07A858}" dt="2026-05-15T00:33:29.039" v="4039" actId="1076"/>
+          <ac:picMkLst>
+            <pc:docMk/>
+            <pc:sldMk cId="553690055" sldId="277"/>
+            <ac:picMk id="5" creationId="{D509EA64-CD86-7F76-4243-83A2503D14D2}"/>
+          </ac:picMkLst>
+        </pc:picChg>
+      </pc:sldChg>
+      <pc:sldChg chg="delSp modSp new mod">
+        <pc:chgData name="Ziqing Liu" userId="20113ce3-4e8c-4eaa-a792-613b3e52886a" providerId="ADAL" clId="{7647F6DA-84E6-4065-910E-AC1B0A07A858}" dt="2026-05-15T00:36:57.248" v="4080" actId="20577"/>
+        <pc:sldMkLst>
+          <pc:docMk/>
+          <pc:sldMk cId="636768404" sldId="278"/>
+        </pc:sldMkLst>
+        <pc:spChg chg="del">
+          <ac:chgData name="Ziqing Liu" userId="20113ce3-4e8c-4eaa-a792-613b3e52886a" providerId="ADAL" clId="{7647F6DA-84E6-4065-910E-AC1B0A07A858}" dt="2026-05-15T00:33:21.990" v="4038" actId="478"/>
+          <ac:spMkLst>
+            <pc:docMk/>
+            <pc:sldMk cId="636768404" sldId="278"/>
+            <ac:spMk id="2" creationId="{42DEAD53-43A5-BD92-67E4-0ECA48E06E33}"/>
+          </ac:spMkLst>
+        </pc:spChg>
+        <pc:spChg chg="mod">
+          <ac:chgData name="Ziqing Liu" userId="20113ce3-4e8c-4eaa-a792-613b3e52886a" providerId="ADAL" clId="{7647F6DA-84E6-4065-910E-AC1B0A07A858}" dt="2026-05-15T00:36:57.248" v="4080" actId="20577"/>
+          <ac:spMkLst>
+            <pc:docMk/>
+            <pc:sldMk cId="636768404" sldId="278"/>
+            <ac:spMk id="3" creationId="{B7BAAE90-231D-70F2-9B56-962B834D014F}"/>
+          </ac:spMkLst>
+        </pc:spChg>
       </pc:sldChg>
     </pc:docChg>
   </pc:docChgLst>
@@ -500,7 +555,7 @@
           <a:p>
             <a:fld id="{3EEF466A-A959-4E0E-8024-BDD72A80DBF2}" type="datetimeFigureOut">
               <a:rPr lang="en-AU" smtClean="0"/>
-              <a:t>13/05/2026</a:t>
+              <a:t>15/05/2026</a:t>
             </a:fld>
             <a:endParaRPr lang="en-AU"/>
           </a:p>
@@ -796,6 +851,13 @@
           </p:nvPr>
         </p:nvSpPr>
         <p:spPr/>
+        <p:txBody>
+          <a:bodyPr/>
+          <a:lstStyle/>
+          <a:p>
+            <a:endParaRPr lang="en-AU"/>
+          </a:p>
+        </p:txBody>
       </p:sp>
       <p:sp>
         <p:nvSpPr>
@@ -828,7 +890,56 @@
                 <a:ea typeface="+mn-ea"/>
                 <a:cs typeface="+mn-cs"/>
               </a:rPr>
-              <a:t>review I will define fitness effect as the effect a mutation has on an organism’s ability to survive in a given environment. This definition is broad and inclusive but most importantly does not propose an assumption of whether it is good or bad. Conversely, cost of resistance is defined as the price an organism pays to survive that is usually in the reduction of fitness in an environment due to factors like antibiotics, pesticides, and toxins. With the definitions I have listed above in mind the main issue we have with the term cost of resistance is that it is too narrow and that it is too much of an assumption often made too early. This is because if we have already </a:t>
+              <a:t>review I will define fitness effect as the effect a mutation has on an organism’s ability to survive in a given environment. So in this case I will be using max od and </a:t>
+            </a:r>
+            <a:r>
+              <a:rPr lang="en-AU" sz="1200" kern="1200" dirty="0" err="1">
+                <a:solidFill>
+                  <a:schemeClr val="tx1"/>
+                </a:solidFill>
+                <a:effectLst/>
+                <a:latin typeface="+mn-lt"/>
+                <a:ea typeface="+mn-ea"/>
+                <a:cs typeface="+mn-cs"/>
+              </a:rPr>
+              <a:t>muamx</a:t>
+            </a:r>
+            <a:r>
+              <a:rPr lang="en-AU" sz="1200" kern="1200" dirty="0">
+                <a:solidFill>
+                  <a:schemeClr val="tx1"/>
+                </a:solidFill>
+                <a:effectLst/>
+                <a:latin typeface="+mn-lt"/>
+                <a:ea typeface="+mn-ea"/>
+                <a:cs typeface="+mn-cs"/>
+              </a:rPr>
+              <a:t> as a measurement of fitness </a:t>
+            </a:r>
+          </a:p>
+          <a:p>
+            <a:endParaRPr lang="en-AU" sz="1200" kern="1200" dirty="0">
+              <a:solidFill>
+                <a:schemeClr val="tx1"/>
+              </a:solidFill>
+              <a:effectLst/>
+              <a:latin typeface="+mn-lt"/>
+              <a:ea typeface="+mn-ea"/>
+              <a:cs typeface="+mn-cs"/>
+            </a:endParaRPr>
+          </a:p>
+          <a:p>
+            <a:r>
+              <a:rPr lang="en-AU" sz="1200" kern="1200" dirty="0">
+                <a:solidFill>
+                  <a:schemeClr val="tx1"/>
+                </a:solidFill>
+                <a:effectLst/>
+                <a:latin typeface="+mn-lt"/>
+                <a:ea typeface="+mn-ea"/>
+                <a:cs typeface="+mn-cs"/>
+              </a:rPr>
+              <a:t> This definition is broad and inclusive but most importantly does not propose an assumption of whether it is good or bad. Conversely, cost of resistance is defined as the price an organism pays to survive that is usually in the reduction of fitness in an environment due to factors like antibiotics, pesticides, and toxins. With the definitions I have listed above in mind the main issue we have with the term cost of resistance is that it is too narrow and that it is too much of an assumption often made too early. This is because if we have already </a:t>
             </a:r>
             <a:r>
               <a:rPr lang="en-AU" sz="1200" kern="1200" dirty="0" err="1">
@@ -922,6 +1033,13 @@
           </p:nvPr>
         </p:nvSpPr>
         <p:spPr/>
+        <p:txBody>
+          <a:bodyPr/>
+          <a:lstStyle/>
+          <a:p>
+            <a:endParaRPr lang="en-AU"/>
+          </a:p>
+        </p:txBody>
       </p:sp>
       <p:sp>
         <p:nvSpPr>
@@ -940,9 +1058,60 @@
           <a:p>
             <a:r>
               <a:rPr lang="en-US" dirty="0"/>
-              <a:t>Red line is the average </a:t>
-            </a:r>
-            <a:endParaRPr lang="en-AU" dirty="0"/>
+              <a:t>Explain the table</a:t>
+            </a:r>
+          </a:p>
+          <a:p>
+            <a:pPr marL="0" marR="0" lvl="0" indent="0" algn="l" defTabSz="914400" rtl="0" eaLnBrk="1" fontAlgn="auto" latinLnBrk="0" hangingPunct="1">
+              <a:lnSpc>
+                <a:spcPct val="100000"/>
+              </a:lnSpc>
+              <a:spcBef>
+                <a:spcPts val="0"/>
+              </a:spcBef>
+              <a:spcAft>
+                <a:spcPts val="0"/>
+              </a:spcAft>
+              <a:buClrTx/>
+              <a:buSzTx/>
+              <a:buFontTx/>
+              <a:buNone/>
+              <a:tabLst/>
+              <a:defRPr/>
+            </a:pPr>
+            <a:r>
+              <a:rPr lang="en-AU" dirty="0"/>
+              <a:t>The mutation rate is unevenly distributed why?</a:t>
+            </a:r>
+          </a:p>
+          <a:p>
+            <a:r>
+              <a:rPr lang="en-US" dirty="0"/>
+              <a:t> </a:t>
+            </a:r>
+          </a:p>
+          <a:p>
+            <a:pPr marL="0" marR="0" lvl="0" indent="0" algn="l" defTabSz="914400" rtl="0" eaLnBrk="1" fontAlgn="auto" latinLnBrk="0" hangingPunct="1">
+              <a:lnSpc>
+                <a:spcPct val="100000"/>
+              </a:lnSpc>
+              <a:spcBef>
+                <a:spcPts val="0"/>
+              </a:spcBef>
+              <a:spcAft>
+                <a:spcPts val="0"/>
+              </a:spcAft>
+              <a:buClrTx/>
+              <a:buSzTx/>
+              <a:buFontTx/>
+              <a:buNone/>
+              <a:tabLst/>
+              <a:defRPr/>
+            </a:pPr>
+            <a:r>
+              <a:rPr lang="en-AU" dirty="0"/>
+              <a:t>The hypothesis is that the mutations we see less of are not “good” mutants and the cost is causing them to die</a:t>
+            </a:r>
           </a:p>
         </p:txBody>
       </p:sp>
@@ -963,7 +1132,7 @@
           <a:p>
             <a:fld id="{FAE2FBA2-9175-4A3F-A6D1-7B9260A1E964}" type="slidenum">
               <a:rPr lang="en-AU" smtClean="0"/>
-              <a:t>11</a:t>
+              <a:t>12</a:t>
             </a:fld>
             <a:endParaRPr lang="en-AU"/>
           </a:p>
@@ -972,7 +1141,7 @@
     </p:spTree>
     <p:extLst>
       <p:ext uri="{BB962C8B-B14F-4D97-AF65-F5344CB8AC3E}">
-        <p14:creationId xmlns:p14="http://schemas.microsoft.com/office/powerpoint/2010/main" val="3102977392"/>
+        <p14:creationId xmlns:p14="http://schemas.microsoft.com/office/powerpoint/2010/main" val="2504208507"/>
       </p:ext>
     </p:extLst>
   </p:cSld>
@@ -1010,6 +1179,13 @@
           </p:nvPr>
         </p:nvSpPr>
         <p:spPr/>
+        <p:txBody>
+          <a:bodyPr/>
+          <a:lstStyle/>
+          <a:p>
+            <a:endParaRPr lang="en-AU"/>
+          </a:p>
+        </p:txBody>
       </p:sp>
       <p:sp>
         <p:nvSpPr>
@@ -1028,33 +1204,23 @@
           <a:p>
             <a:r>
               <a:rPr lang="en-US" dirty="0"/>
-              <a:t>Explain the table </a:t>
-            </a:r>
-          </a:p>
-          <a:p>
-            <a:pPr marL="0" marR="0" lvl="0" indent="0" algn="l" defTabSz="914400" rtl="0" eaLnBrk="1" fontAlgn="auto" latinLnBrk="0" hangingPunct="1">
-              <a:lnSpc>
-                <a:spcPct val="100000"/>
-              </a:lnSpc>
-              <a:spcBef>
-                <a:spcPts val="0"/>
-              </a:spcBef>
-              <a:spcAft>
-                <a:spcPts val="0"/>
-              </a:spcAft>
-              <a:buClrTx/>
-              <a:buSzTx/>
-              <a:buFontTx/>
-              <a:buNone/>
-              <a:tabLst/>
-              <a:defRPr/>
-            </a:pPr>
-            <a:r>
-              <a:rPr lang="en-AU" dirty="0"/>
-              <a:t>The hypothesis is that even though the rare mutations are resistant the cost might be too high so that they are dying </a:t>
-            </a:r>
-          </a:p>
-          <a:p>
+              <a:t>To test if this is true …</a:t>
+            </a:r>
+          </a:p>
+          <a:p>
+            <a:r>
+              <a:rPr lang="en-US" dirty="0"/>
+              <a:t>Testing to see if there is correlation between mutation rate and survivability </a:t>
+            </a:r>
+          </a:p>
+          <a:p>
+            <a:endParaRPr lang="en-US" dirty="0"/>
+          </a:p>
+          <a:p>
+            <a:r>
+              <a:rPr lang="en-US" dirty="0" err="1"/>
+              <a:t>i</a:t>
+            </a:r>
             <a:endParaRPr lang="en-AU" dirty="0"/>
           </a:p>
         </p:txBody>
@@ -1076,7 +1242,7 @@
           <a:p>
             <a:fld id="{FAE2FBA2-9175-4A3F-A6D1-7B9260A1E964}" type="slidenum">
               <a:rPr lang="en-AU" smtClean="0"/>
-              <a:t>16</a:t>
+              <a:t>13</a:t>
             </a:fld>
             <a:endParaRPr lang="en-AU"/>
           </a:p>
@@ -1085,7 +1251,7 @@
     </p:spTree>
     <p:extLst>
       <p:ext uri="{BB962C8B-B14F-4D97-AF65-F5344CB8AC3E}">
-        <p14:creationId xmlns:p14="http://schemas.microsoft.com/office/powerpoint/2010/main" val="2504208507"/>
+        <p14:creationId xmlns:p14="http://schemas.microsoft.com/office/powerpoint/2010/main" val="1400284457"/>
       </p:ext>
     </p:extLst>
   </p:cSld>
@@ -1123,6 +1289,13 @@
           </p:nvPr>
         </p:nvSpPr>
         <p:spPr/>
+        <p:txBody>
+          <a:bodyPr/>
+          <a:lstStyle/>
+          <a:p>
+            <a:endParaRPr lang="en-AU"/>
+          </a:p>
+        </p:txBody>
       </p:sp>
       <p:sp>
         <p:nvSpPr>
@@ -1141,14 +1314,16 @@
           <a:p>
             <a:r>
               <a:rPr lang="en-US" dirty="0"/>
-              <a:t>To test if this is true …</a:t>
-            </a:r>
-          </a:p>
-          <a:p>
-            <a:r>
-              <a:rPr lang="en-US" dirty="0"/>
-              <a:t>Testing to see if there is correlation between mutation rate and survivability </a:t>
-            </a:r>
+              <a:t>Ideally we see the mutants with the highest mutation rate to have the most number of colonies and the rare mutants to have much or less as they are all dead (hopefully this supports the idea that the reason we see so many of the same mutation pop up is because it managed to live longer than the rare mutations </a:t>
+            </a:r>
+          </a:p>
+          <a:p>
+            <a:endParaRPr lang="en-US" dirty="0"/>
+          </a:p>
+          <a:p>
+            <a:endParaRPr lang="en-AU" dirty="0"/>
+          </a:p>
+          <a:p>
             <a:endParaRPr lang="en-AU" dirty="0"/>
           </a:p>
         </p:txBody>
@@ -1170,7 +1345,7 @@
           <a:p>
             <a:fld id="{FAE2FBA2-9175-4A3F-A6D1-7B9260A1E964}" type="slidenum">
               <a:rPr lang="en-AU" smtClean="0"/>
-              <a:t>17</a:t>
+              <a:t>14</a:t>
             </a:fld>
             <a:endParaRPr lang="en-AU"/>
           </a:p>
@@ -1179,7 +1354,7 @@
     </p:spTree>
     <p:extLst>
       <p:ext uri="{BB962C8B-B14F-4D97-AF65-F5344CB8AC3E}">
-        <p14:creationId xmlns:p14="http://schemas.microsoft.com/office/powerpoint/2010/main" val="1400284457"/>
+        <p14:creationId xmlns:p14="http://schemas.microsoft.com/office/powerpoint/2010/main" val="1981394592"/>
       </p:ext>
     </p:extLst>
   </p:cSld>
@@ -1217,6 +1392,13 @@
           </p:nvPr>
         </p:nvSpPr>
         <p:spPr/>
+        <p:txBody>
+          <a:bodyPr/>
+          <a:lstStyle/>
+          <a:p>
+            <a:endParaRPr lang="en-AU"/>
+          </a:p>
+        </p:txBody>
       </p:sp>
       <p:sp>
         <p:nvSpPr>
@@ -1235,80 +1417,11 @@
           <a:p>
             <a:r>
               <a:rPr lang="en-US" dirty="0"/>
-              <a:t>Ideally we see the mutants with the highest mutation rate to have the most number of colonies and the rare mutants to have much or less  as they are all dead (hopefully this supports the idea that the reason we see so many of the same mutation pop up is because it managed to live longer than the rare mutations </a:t>
+              <a:t>Negin’s Only the GGC and the GGT codons can mutate toward codons coding for aspartic acid (A) in a single step so it will be the most likely </a:t>
             </a:r>
           </a:p>
           <a:p>
             <a:endParaRPr lang="en-US" dirty="0"/>
-          </a:p>
-          <a:p>
-            <a:r>
-              <a:rPr lang="en-US" dirty="0"/>
-              <a:t>I don’t know if this will be the case but ill start the experiment next week</a:t>
-            </a:r>
-          </a:p>
-          <a:p>
-            <a:pPr rtl="0" fontAlgn="t"/>
-            <a:r>
-              <a:rPr lang="en-AU" sz="1200" kern="1200" dirty="0">
-                <a:solidFill>
-                  <a:schemeClr val="tx1"/>
-                </a:solidFill>
-                <a:effectLst/>
-                <a:latin typeface="+mn-lt"/>
-                <a:ea typeface="+mn-ea"/>
-                <a:cs typeface="+mn-cs"/>
-              </a:rPr>
-              <a:t>Codon accessibility                                                        </a:t>
-            </a:r>
-          </a:p>
-          <a:p>
-            <a:pPr rtl="0" fontAlgn="t"/>
-            <a:r>
-              <a:rPr lang="en-AU" sz="1200" kern="1200" dirty="0">
-                <a:solidFill>
-                  <a:schemeClr val="tx1"/>
-                </a:solidFill>
-                <a:effectLst/>
-                <a:latin typeface="+mn-lt"/>
-                <a:ea typeface="+mn-ea"/>
-                <a:cs typeface="+mn-cs"/>
-              </a:rPr>
-              <a:t>High resistance, low fitness cost</a:t>
-            </a:r>
-          </a:p>
-          <a:p>
-            <a:pPr rtl="0" fontAlgn="t"/>
-            <a:r>
-              <a:rPr lang="en-AU" sz="1200" kern="1200" dirty="0">
-                <a:solidFill>
-                  <a:schemeClr val="tx1"/>
-                </a:solidFill>
-                <a:effectLst/>
-                <a:latin typeface="+mn-lt"/>
-                <a:ea typeface="+mn-ea"/>
-                <a:cs typeface="+mn-cs"/>
-              </a:rPr>
-              <a:t>Compensatory evolution</a:t>
-            </a:r>
-          </a:p>
-          <a:p>
-            <a:pPr rtl="0" fontAlgn="t"/>
-            <a:r>
-              <a:rPr lang="en-AU" sz="1200" kern="1200" dirty="0">
-                <a:solidFill>
-                  <a:schemeClr val="tx1"/>
-                </a:solidFill>
-                <a:effectLst/>
-                <a:latin typeface="+mn-lt"/>
-                <a:ea typeface="+mn-ea"/>
-                <a:cs typeface="+mn-cs"/>
-              </a:rPr>
-              <a:t>Transmission advantage</a:t>
-            </a:r>
-          </a:p>
-          <a:p>
-            <a:endParaRPr lang="en-AU" dirty="0"/>
           </a:p>
           <a:p>
             <a:pPr rtl="0" fontAlgn="t"/>
@@ -1416,7 +1529,7 @@
           <a:p>
             <a:fld id="{FAE2FBA2-9175-4A3F-A6D1-7B9260A1E964}" type="slidenum">
               <a:rPr lang="en-AU" smtClean="0"/>
-              <a:t>18</a:t>
+              <a:t>15</a:t>
             </a:fld>
             <a:endParaRPr lang="en-AU"/>
           </a:p>
@@ -1425,7 +1538,102 @@
     </p:spTree>
     <p:extLst>
       <p:ext uri="{BB962C8B-B14F-4D97-AF65-F5344CB8AC3E}">
-        <p14:creationId xmlns:p14="http://schemas.microsoft.com/office/powerpoint/2010/main" val="1981394592"/>
+        <p14:creationId xmlns:p14="http://schemas.microsoft.com/office/powerpoint/2010/main" val="962786836"/>
+      </p:ext>
+    </p:extLst>
+  </p:cSld>
+  <p:clrMapOvr>
+    <a:masterClrMapping/>
+  </p:clrMapOvr>
+</p:notes>
+</file>
+
+<file path=ppt/notesSlides/notesSlide14.xml><?xml version="1.0" encoding="utf-8"?>
+<p:notes xmlns:a="http://schemas.openxmlformats.org/drawingml/2006/main" xmlns:r="http://schemas.openxmlformats.org/officeDocument/2006/relationships" xmlns:p="http://schemas.openxmlformats.org/presentationml/2006/main">
+  <p:cSld>
+    <p:spTree>
+      <p:nvGrpSpPr>
+        <p:cNvPr id="1" name=""/>
+        <p:cNvGrpSpPr/>
+        <p:nvPr/>
+      </p:nvGrpSpPr>
+      <p:grpSpPr>
+        <a:xfrm>
+          <a:off x="0" y="0"/>
+          <a:ext cx="0" cy="0"/>
+          <a:chOff x="0" y="0"/>
+          <a:chExt cx="0" cy="0"/>
+        </a:xfrm>
+      </p:grpSpPr>
+      <p:sp>
+        <p:nvSpPr>
+          <p:cNvPr id="2" name="Slide Image Placeholder 1"/>
+          <p:cNvSpPr>
+            <a:spLocks noGrp="1" noRot="1" noChangeAspect="1"/>
+          </p:cNvSpPr>
+          <p:nvPr>
+            <p:ph type="sldImg"/>
+          </p:nvPr>
+        </p:nvSpPr>
+        <p:spPr/>
+        <p:txBody>
+          <a:bodyPr/>
+          <a:lstStyle/>
+          <a:p>
+            <a:endParaRPr lang="en-AU"/>
+          </a:p>
+        </p:txBody>
+      </p:sp>
+      <p:sp>
+        <p:nvSpPr>
+          <p:cNvPr id="3" name="Notes Placeholder 2"/>
+          <p:cNvSpPr>
+            <a:spLocks noGrp="1"/>
+          </p:cNvSpPr>
+          <p:nvPr>
+            <p:ph type="body" idx="1"/>
+          </p:nvPr>
+        </p:nvSpPr>
+        <p:spPr/>
+        <p:txBody>
+          <a:bodyPr/>
+          <a:lstStyle/>
+          <a:p>
+            <a:r>
+              <a:rPr lang="en-US" dirty="0"/>
+              <a:t>Red line is the average </a:t>
+            </a:r>
+            <a:endParaRPr lang="en-AU" dirty="0"/>
+          </a:p>
+        </p:txBody>
+      </p:sp>
+      <p:sp>
+        <p:nvSpPr>
+          <p:cNvPr id="4" name="Slide Number Placeholder 3"/>
+          <p:cNvSpPr>
+            <a:spLocks noGrp="1"/>
+          </p:cNvSpPr>
+          <p:nvPr>
+            <p:ph type="sldNum" sz="quarter" idx="5"/>
+          </p:nvPr>
+        </p:nvSpPr>
+        <p:spPr/>
+        <p:txBody>
+          <a:bodyPr/>
+          <a:lstStyle/>
+          <a:p>
+            <a:fld id="{FAE2FBA2-9175-4A3F-A6D1-7B9260A1E964}" type="slidenum">
+              <a:rPr lang="en-AU" smtClean="0"/>
+              <a:t>17</a:t>
+            </a:fld>
+            <a:endParaRPr lang="en-AU"/>
+          </a:p>
+        </p:txBody>
+      </p:sp>
+    </p:spTree>
+    <p:extLst>
+      <p:ext uri="{BB962C8B-B14F-4D97-AF65-F5344CB8AC3E}">
+        <p14:creationId xmlns:p14="http://schemas.microsoft.com/office/powerpoint/2010/main" val="3102977392"/>
       </p:ext>
     </p:extLst>
   </p:cSld>
@@ -1463,6 +1671,13 @@
           </p:nvPr>
         </p:nvSpPr>
         <p:spPr/>
+        <p:txBody>
+          <a:bodyPr/>
+          <a:lstStyle/>
+          <a:p>
+            <a:endParaRPr lang="en-AU"/>
+          </a:p>
+        </p:txBody>
       </p:sp>
       <p:sp>
         <p:nvSpPr>
@@ -1498,6 +1713,49 @@
             </a:pPr>
             <a:r>
               <a:rPr lang="en-US" dirty="0"/>
+              <a:t>Explain mutation list </a:t>
+            </a:r>
+          </a:p>
+          <a:p>
+            <a:pPr marL="0" marR="0" lvl="0" indent="0" algn="l" defTabSz="914400" rtl="0" eaLnBrk="1" fontAlgn="auto" latinLnBrk="0" hangingPunct="1">
+              <a:lnSpc>
+                <a:spcPct val="100000"/>
+              </a:lnSpc>
+              <a:spcBef>
+                <a:spcPts val="0"/>
+              </a:spcBef>
+              <a:spcAft>
+                <a:spcPts val="0"/>
+              </a:spcAft>
+              <a:buClrTx/>
+              <a:buSzTx/>
+              <a:buFontTx/>
+              <a:buNone/>
+              <a:tabLst/>
+              <a:defRPr/>
+            </a:pPr>
+            <a:endParaRPr lang="en-US" dirty="0"/>
+          </a:p>
+          <a:p>
+            <a:pPr marL="0" marR="0" lvl="0" indent="0" algn="l" defTabSz="914400" rtl="0" eaLnBrk="1" fontAlgn="auto" latinLnBrk="0" hangingPunct="1">
+              <a:lnSpc>
+                <a:spcPct val="100000"/>
+              </a:lnSpc>
+              <a:spcBef>
+                <a:spcPts val="0"/>
+              </a:spcBef>
+              <a:spcAft>
+                <a:spcPts val="0"/>
+              </a:spcAft>
+              <a:buClrTx/>
+              <a:buSzTx/>
+              <a:buFontTx/>
+              <a:buNone/>
+              <a:tabLst/>
+              <a:defRPr/>
+            </a:pPr>
+            <a:r>
+              <a:rPr lang="en-US" dirty="0"/>
               <a:t>So how we set up the </a:t>
             </a:r>
             <a:r>
@@ -1506,15 +1764,7 @@
             </a:r>
             <a:r>
               <a:rPr lang="en-US" dirty="0"/>
-              <a:t> was that we test mutants under 1 temperature in 2 media. How we do this is we split a 96 well plate in 2 and After we </a:t>
-            </a:r>
-            <a:r>
-              <a:rPr lang="en-US"/>
-              <a:t>exclude the </a:t>
-            </a:r>
-            <a:r>
-              <a:rPr lang="en-US" dirty="0"/>
-              <a:t>border there are 60 wells left then if we blank 2 one </a:t>
+              <a:t> was that we test mutants under 1 temperature in 2 media. How we do this is we split a 96 well plate in 2 and After we exclude the border there are 60 wells left then if we blank 2 one </a:t>
             </a:r>
             <a:r>
               <a:rPr lang="en-US" dirty="0" err="1"/>
@@ -1600,6 +1850,13 @@
           </p:nvPr>
         </p:nvSpPr>
         <p:spPr/>
+        <p:txBody>
+          <a:bodyPr/>
+          <a:lstStyle/>
+          <a:p>
+            <a:endParaRPr lang="en-AU"/>
+          </a:p>
+        </p:txBody>
       </p:sp>
       <p:sp>
         <p:nvSpPr>
@@ -1615,6 +1872,15 @@
         <p:txBody>
           <a:bodyPr/>
           <a:lstStyle/>
+          <a:p>
+            <a:r>
+              <a:rPr lang="en-US" dirty="0"/>
+              <a:t>Explain how the spec fits with shiny plate </a:t>
+            </a:r>
+          </a:p>
+          <a:p>
+            <a:endParaRPr lang="en-US" dirty="0"/>
+          </a:p>
           <a:p>
             <a:r>
               <a:rPr lang="en-US" dirty="0"/>
@@ -1697,6 +1963,13 @@
           </p:nvPr>
         </p:nvSpPr>
         <p:spPr/>
+        <p:txBody>
+          <a:bodyPr/>
+          <a:lstStyle/>
+          <a:p>
+            <a:endParaRPr lang="en-AU"/>
+          </a:p>
+        </p:txBody>
       </p:sp>
       <p:sp>
         <p:nvSpPr>
@@ -1715,7 +1988,7 @@
           <a:p>
             <a:r>
               <a:rPr lang="en-US" dirty="0"/>
-              <a:t>I think upped the temp to 45 and from what we can see the bacteria in m9 has completely stopped growing however LB still looks too good </a:t>
+              <a:t>I upped the temp to 45 and from what we can see the bacteria in m9 has completely stopped growing however LB still looks too good </a:t>
             </a:r>
             <a:endParaRPr lang="en-AU" dirty="0"/>
           </a:p>
@@ -1785,6 +2058,13 @@
           </p:nvPr>
         </p:nvSpPr>
         <p:spPr/>
+        <p:txBody>
+          <a:bodyPr/>
+          <a:lstStyle/>
+          <a:p>
+            <a:endParaRPr lang="en-AU"/>
+          </a:p>
+        </p:txBody>
       </p:sp>
       <p:sp>
         <p:nvSpPr>
@@ -1873,6 +2153,13 @@
           </p:nvPr>
         </p:nvSpPr>
         <p:spPr/>
+        <p:txBody>
+          <a:bodyPr/>
+          <a:lstStyle/>
+          <a:p>
+            <a:endParaRPr lang="en-AU"/>
+          </a:p>
+        </p:txBody>
       </p:sp>
       <p:sp>
         <p:nvSpPr>
@@ -1961,6 +2248,13 @@
           </p:nvPr>
         </p:nvSpPr>
         <p:spPr/>
+        <p:txBody>
+          <a:bodyPr/>
+          <a:lstStyle/>
+          <a:p>
+            <a:endParaRPr lang="en-AU"/>
+          </a:p>
+        </p:txBody>
       </p:sp>
       <p:sp>
         <p:nvSpPr>
@@ -1978,8 +2272,20 @@
           <a:lstStyle/>
           <a:p>
             <a:r>
+              <a:rPr lang="en-US" dirty="0" err="1"/>
+              <a:t>Tempeartrue</a:t>
+            </a:r>
+            <a:r>
               <a:rPr lang="en-US" dirty="0"/>
-              <a:t>They reach saturation at 30-37 in LB and 42-37-30 in M9  </a:t>
+              <a:t> one the side mutants at the bottom. They start from </a:t>
+            </a:r>
+            <a:r>
+              <a:rPr lang="en-US" dirty="0" err="1"/>
+              <a:t>groing</a:t>
+            </a:r>
+            <a:r>
+              <a:rPr lang="en-US" dirty="0"/>
+              <a:t> really well to not at all They reach saturation at 30-37 in LB and 42-37-30 in M9  </a:t>
             </a:r>
             <a:endParaRPr lang="en-AU" dirty="0"/>
           </a:p>
@@ -2049,6 +2355,13 @@
           </p:nvPr>
         </p:nvSpPr>
         <p:spPr/>
+        <p:txBody>
+          <a:bodyPr/>
+          <a:lstStyle/>
+          <a:p>
+            <a:endParaRPr lang="en-AU"/>
+          </a:p>
+        </p:txBody>
       </p:sp>
       <p:sp>
         <p:nvSpPr>
@@ -2067,7 +2380,15 @@
           <a:p>
             <a:r>
               <a:rPr lang="en-US" dirty="0"/>
-              <a:t>Sweet spot for growth is between 37 and 42 </a:t>
+              <a:t>Sweet spot for growth is between 37 and 42 in </a:t>
+            </a:r>
+            <a:r>
+              <a:rPr lang="en-US" dirty="0" err="1"/>
+              <a:t>lb</a:t>
+            </a:r>
+            <a:r>
+              <a:rPr lang="en-US" dirty="0"/>
+              <a:t> and m9 </a:t>
             </a:r>
             <a:endParaRPr lang="en-AU" dirty="0"/>
           </a:p>
@@ -2137,6 +2458,13 @@
           </p:nvPr>
         </p:nvSpPr>
         <p:spPr/>
+        <p:txBody>
+          <a:bodyPr/>
+          <a:lstStyle/>
+          <a:p>
+            <a:endParaRPr lang="en-AU"/>
+          </a:p>
+        </p:txBody>
       </p:sp>
       <p:sp>
         <p:nvSpPr>
@@ -2172,7 +2500,7 @@
             </a:pPr>
             <a:r>
               <a:rPr lang="en-US" dirty="0"/>
-              <a:t>OD is highest for M9 at 42c which is not traditionally optimal Even though the mutants are growing better in LB than M9 its interesting that the optimal for LB seems to be at 30-37c while m9 it seems to be 42 and maybe 37. the high </a:t>
+              <a:t>OD is highest for most mutants grown in M9 at 42c which is not traditionally optimal. Even though the mutants are growing better in LB than M9 at high temp its interesting that the optimal for LB seems to be at 30-37c while m9 it seems to be 42 and maybe 37. the high </a:t>
             </a:r>
             <a:r>
               <a:rPr lang="en-US" dirty="0" err="1"/>
@@ -2180,8 +2508,32 @@
             </a:r>
             <a:r>
               <a:rPr lang="en-US" dirty="0"/>
-              <a:t> for LB at 42 is not translating to OD (even though our mutants can grow at 45 in LB it is seems to prefer 30-37 while although mutants don’t grow in M9 at 45 it seems to prefer 42c)</a:t>
-            </a:r>
+              <a:t> for LB at 42 is not translating to OD (even though our mutants can grow at 45 in LB it is seems to prefer 30-37 while although mutants don’t grow in M9 at 45 it seems to prefer </a:t>
+            </a:r>
+            <a:r>
+              <a:rPr lang="en-US"/>
+              <a:t>42c)</a:t>
+            </a:r>
+          </a:p>
+          <a:p>
+            <a:pPr marL="0" marR="0" lvl="0" indent="0" algn="l" defTabSz="914400" rtl="0" eaLnBrk="1" fontAlgn="auto" latinLnBrk="0" hangingPunct="1">
+              <a:lnSpc>
+                <a:spcPct val="100000"/>
+              </a:lnSpc>
+              <a:spcBef>
+                <a:spcPts val="0"/>
+              </a:spcBef>
+              <a:spcAft>
+                <a:spcPts val="0"/>
+              </a:spcAft>
+              <a:buClrTx/>
+              <a:buSzTx/>
+              <a:buFontTx/>
+              <a:buNone/>
+              <a:tabLst/>
+              <a:defRPr/>
+            </a:pPr>
+            <a:endParaRPr lang="en-US" dirty="0"/>
           </a:p>
           <a:p>
             <a:pPr marL="0" marR="0" lvl="0" indent="0" algn="l" defTabSz="914400" rtl="0" eaLnBrk="1" fontAlgn="auto" latinLnBrk="0" hangingPunct="1">
@@ -2359,76 +2711,6 @@
                 <a:cs typeface="+mn-cs"/>
               </a:rPr>
               <a:t>So while it does not provide extra benefit it seems to not be a burden on the bacteria </a:t>
-            </a:r>
-            <a:endParaRPr lang="en-AU" sz="1200" kern="1200" dirty="0">
-              <a:solidFill>
-                <a:schemeClr val="tx1"/>
-              </a:solidFill>
-              <a:effectLst/>
-              <a:latin typeface="+mn-lt"/>
-              <a:ea typeface="+mn-ea"/>
-              <a:cs typeface="+mn-cs"/>
-            </a:endParaRPr>
-          </a:p>
-          <a:p>
-            <a:r>
-              <a:rPr lang="en-AU" sz="1200" b="1" kern="1200" dirty="0">
-                <a:solidFill>
-                  <a:schemeClr val="tx1"/>
-                </a:solidFill>
-                <a:effectLst/>
-                <a:latin typeface="+mn-lt"/>
-                <a:ea typeface="+mn-ea"/>
-                <a:cs typeface="+mn-cs"/>
-              </a:rPr>
-              <a:t>Seems like </a:t>
-            </a:r>
-            <a:r>
-              <a:rPr lang="en-AU" sz="1200" b="1" kern="1200" dirty="0" err="1">
-                <a:solidFill>
-                  <a:schemeClr val="tx1"/>
-                </a:solidFill>
-                <a:effectLst/>
-                <a:latin typeface="+mn-lt"/>
-                <a:ea typeface="+mn-ea"/>
-                <a:cs typeface="+mn-cs"/>
-              </a:rPr>
-              <a:t>rpoB</a:t>
-            </a:r>
-            <a:r>
-              <a:rPr lang="en-AU" sz="1200" b="1" kern="1200" dirty="0">
-                <a:solidFill>
-                  <a:schemeClr val="tx1"/>
-                </a:solidFill>
-                <a:effectLst/>
-                <a:latin typeface="+mn-lt"/>
-                <a:ea typeface="+mn-ea"/>
-                <a:cs typeface="+mn-cs"/>
-              </a:rPr>
-              <a:t> mutations are neither beneficial or deleterious which in itself is interesting </a:t>
-            </a:r>
-            <a:endParaRPr lang="en-AU" sz="1200" kern="1200" dirty="0">
-              <a:solidFill>
-                <a:schemeClr val="tx1"/>
-              </a:solidFill>
-              <a:effectLst/>
-              <a:latin typeface="+mn-lt"/>
-              <a:ea typeface="+mn-ea"/>
-              <a:cs typeface="+mn-cs"/>
-            </a:endParaRPr>
-          </a:p>
-          <a:p>
-            <a:r>
-              <a:rPr lang="en-AU" sz="1200" b="1" kern="1200" dirty="0">
-                <a:solidFill>
-                  <a:schemeClr val="tx1"/>
-                </a:solidFill>
-                <a:effectLst/>
-                <a:latin typeface="+mn-lt"/>
-                <a:ea typeface="+mn-ea"/>
-                <a:cs typeface="+mn-cs"/>
-              </a:rPr>
-              <a:t>Some nuance like M12</a:t>
             </a:r>
             <a:endParaRPr lang="en-AU" sz="1200" kern="1200" dirty="0">
               <a:solidFill>
@@ -2669,7 +2951,7 @@
           <a:p>
             <a:fld id="{E7611B22-EA13-474B-83BA-8A12F66AADAF}" type="datetimeFigureOut">
               <a:rPr lang="en-AU" smtClean="0"/>
-              <a:t>13/05/2026</a:t>
+              <a:t>15/05/2026</a:t>
             </a:fld>
             <a:endParaRPr lang="en-AU"/>
           </a:p>
@@ -2904,7 +3186,7 @@
           <a:p>
             <a:fld id="{E7611B22-EA13-474B-83BA-8A12F66AADAF}" type="datetimeFigureOut">
               <a:rPr lang="en-AU" smtClean="0"/>
-              <a:t>13/05/2026</a:t>
+              <a:t>15/05/2026</a:t>
             </a:fld>
             <a:endParaRPr lang="en-AU"/>
           </a:p>
@@ -3084,7 +3366,7 @@
           <a:p>
             <a:fld id="{E7611B22-EA13-474B-83BA-8A12F66AADAF}" type="datetimeFigureOut">
               <a:rPr lang="en-AU" smtClean="0"/>
-              <a:t>13/05/2026</a:t>
+              <a:t>15/05/2026</a:t>
             </a:fld>
             <a:endParaRPr lang="en-AU"/>
           </a:p>
@@ -3254,7 +3536,7 @@
           <a:p>
             <a:fld id="{E7611B22-EA13-474B-83BA-8A12F66AADAF}" type="datetimeFigureOut">
               <a:rPr lang="en-AU" smtClean="0"/>
-              <a:t>13/05/2026</a:t>
+              <a:t>15/05/2026</a:t>
             </a:fld>
             <a:endParaRPr lang="en-AU"/>
           </a:p>
@@ -3508,7 +3790,7 @@
           <a:p>
             <a:fld id="{E7611B22-EA13-474B-83BA-8A12F66AADAF}" type="datetimeFigureOut">
               <a:rPr lang="en-AU" smtClean="0"/>
-              <a:t>13/05/2026</a:t>
+              <a:t>15/05/2026</a:t>
             </a:fld>
             <a:endParaRPr lang="en-AU"/>
           </a:p>
@@ -3593,6 +3875,13 @@
             <a:schemeClr val="lt1"/>
           </a:fontRef>
         </p:style>
+        <p:txBody>
+          <a:bodyPr/>
+          <a:lstStyle/>
+          <a:p>
+            <a:endParaRPr lang="en-AU"/>
+          </a:p>
+        </p:txBody>
       </p:sp>
     </p:spTree>
     <p:extLst>
@@ -3834,7 +4123,7 @@
           <a:p>
             <a:fld id="{E7611B22-EA13-474B-83BA-8A12F66AADAF}" type="datetimeFigureOut">
               <a:rPr lang="en-AU" smtClean="0"/>
-              <a:t>13/05/2026</a:t>
+              <a:t>15/05/2026</a:t>
             </a:fld>
             <a:endParaRPr lang="en-AU"/>
           </a:p>
@@ -4285,7 +4574,7 @@
           <a:p>
             <a:fld id="{E7611B22-EA13-474B-83BA-8A12F66AADAF}" type="datetimeFigureOut">
               <a:rPr lang="en-AU" smtClean="0"/>
-              <a:t>13/05/2026</a:t>
+              <a:t>15/05/2026</a:t>
             </a:fld>
             <a:endParaRPr lang="en-AU"/>
           </a:p>
@@ -4403,7 +4692,7 @@
           <a:p>
             <a:fld id="{E7611B22-EA13-474B-83BA-8A12F66AADAF}" type="datetimeFigureOut">
               <a:rPr lang="en-AU" smtClean="0"/>
-              <a:t>13/05/2026</a:t>
+              <a:t>15/05/2026</a:t>
             </a:fld>
             <a:endParaRPr lang="en-AU"/>
           </a:p>
@@ -4498,7 +4787,7 @@
           <a:p>
             <a:fld id="{E7611B22-EA13-474B-83BA-8A12F66AADAF}" type="datetimeFigureOut">
               <a:rPr lang="en-AU" smtClean="0"/>
-              <a:t>13/05/2026</a:t>
+              <a:t>15/05/2026</a:t>
             </a:fld>
             <a:endParaRPr lang="en-AU"/>
           </a:p>
@@ -4785,7 +5074,7 @@
           <a:p>
             <a:fld id="{E7611B22-EA13-474B-83BA-8A12F66AADAF}" type="datetimeFigureOut">
               <a:rPr lang="en-AU" smtClean="0"/>
-              <a:t>13/05/2026</a:t>
+              <a:t>15/05/2026</a:t>
             </a:fld>
             <a:endParaRPr lang="en-AU"/>
           </a:p>
@@ -4900,6 +5189,13 @@
             <a:schemeClr val="lt1"/>
           </a:fontRef>
         </p:style>
+        <p:txBody>
+          <a:bodyPr/>
+          <a:lstStyle/>
+          <a:p>
+            <a:endParaRPr lang="en-AU"/>
+          </a:p>
+        </p:txBody>
       </p:sp>
       <p:sp>
         <p:nvSpPr>
@@ -5107,7 +5403,7 @@
           <a:p>
             <a:fld id="{E7611B22-EA13-474B-83BA-8A12F66AADAF}" type="datetimeFigureOut">
               <a:rPr lang="en-AU" smtClean="0"/>
-              <a:t>13/05/2026</a:t>
+              <a:t>15/05/2026</a:t>
             </a:fld>
             <a:endParaRPr lang="en-AU"/>
           </a:p>
@@ -5368,7 +5664,7 @@
           <a:p>
             <a:fld id="{E7611B22-EA13-474B-83BA-8A12F66AADAF}" type="datetimeFigureOut">
               <a:rPr lang="en-AU" smtClean="0"/>
-              <a:t>13/05/2026</a:t>
+              <a:t>15/05/2026</a:t>
             </a:fld>
             <a:endParaRPr lang="en-AU"/>
           </a:p>
@@ -5996,7 +6292,7 @@
           <a:p>
             <a:r>
               <a:rPr lang="en-US" dirty="0"/>
-              <a:t>As expected at 48</a:t>
+              <a:t>At 48</a:t>
             </a:r>
             <a:r>
               <a:rPr lang="en-AU" dirty="0"/>
@@ -6130,6 +6426,718 @@
       </p:grpSpPr>
       <p:sp>
         <p:nvSpPr>
+          <p:cNvPr id="2" name="Title 1">
+            <a:extLst>
+              <a:ext uri="{FF2B5EF4-FFF2-40B4-BE49-F238E27FC236}">
+                <a16:creationId xmlns:a16="http://schemas.microsoft.com/office/drawing/2014/main" id="{B072C49B-7743-4ECA-4DFC-2A36B9C11C83}"/>
+              </a:ext>
+            </a:extLst>
+          </p:cNvPr>
+          <p:cNvSpPr>
+            <a:spLocks noGrp="1"/>
+          </p:cNvSpPr>
+          <p:nvPr>
+            <p:ph type="title"/>
+          </p:nvPr>
+        </p:nvSpPr>
+        <p:spPr/>
+        <p:txBody>
+          <a:bodyPr/>
+          <a:lstStyle/>
+          <a:p>
+            <a:r>
+              <a:rPr lang="en-US" dirty="0"/>
+              <a:t>Chapter 2 </a:t>
+            </a:r>
+            <a:endParaRPr lang="en-AU" dirty="0"/>
+          </a:p>
+        </p:txBody>
+      </p:sp>
+      <p:sp>
+        <p:nvSpPr>
+          <p:cNvPr id="3" name="Content Placeholder 2">
+            <a:extLst>
+              <a:ext uri="{FF2B5EF4-FFF2-40B4-BE49-F238E27FC236}">
+                <a16:creationId xmlns:a16="http://schemas.microsoft.com/office/drawing/2014/main" id="{FFD0EB59-5046-2900-FE7E-DA5B4AD35E16}"/>
+              </a:ext>
+            </a:extLst>
+          </p:cNvPr>
+          <p:cNvSpPr>
+            <a:spLocks noGrp="1"/>
+          </p:cNvSpPr>
+          <p:nvPr>
+            <p:ph idx="1"/>
+          </p:nvPr>
+        </p:nvSpPr>
+        <p:spPr/>
+        <p:txBody>
+          <a:bodyPr/>
+          <a:lstStyle/>
+          <a:p>
+            <a:r>
+              <a:rPr lang="en-US" dirty="0"/>
+              <a:t>Looking at why there is an uneven distribution of mutation rate in our RIF mutants</a:t>
+            </a:r>
+            <a:endParaRPr lang="en-AU" dirty="0"/>
+          </a:p>
+        </p:txBody>
+      </p:sp>
+    </p:spTree>
+    <p:extLst>
+      <p:ext uri="{BB962C8B-B14F-4D97-AF65-F5344CB8AC3E}">
+        <p14:creationId xmlns:p14="http://schemas.microsoft.com/office/powerpoint/2010/main" val="2551635289"/>
+      </p:ext>
+    </p:extLst>
+  </p:cSld>
+  <p:clrMapOvr>
+    <a:masterClrMapping/>
+  </p:clrMapOvr>
+</p:sld>
+</file>
+
+<file path=ppt/slides/slide12.xml><?xml version="1.0" encoding="utf-8"?>
+<p:sld xmlns:a="http://schemas.openxmlformats.org/drawingml/2006/main" xmlns:r="http://schemas.openxmlformats.org/officeDocument/2006/relationships" xmlns:p="http://schemas.openxmlformats.org/presentationml/2006/main">
+  <p:cSld>
+    <p:spTree>
+      <p:nvGrpSpPr>
+        <p:cNvPr id="1" name=""/>
+        <p:cNvGrpSpPr/>
+        <p:nvPr/>
+      </p:nvGrpSpPr>
+      <p:grpSpPr>
+        <a:xfrm>
+          <a:off x="0" y="0"/>
+          <a:ext cx="0" cy="0"/>
+          <a:chOff x="0" y="0"/>
+          <a:chExt cx="0" cy="0"/>
+        </a:xfrm>
+      </p:grpSpPr>
+      <p:sp>
+        <p:nvSpPr>
+          <p:cNvPr id="2" name="Title 1">
+            <a:extLst>
+              <a:ext uri="{FF2B5EF4-FFF2-40B4-BE49-F238E27FC236}">
+                <a16:creationId xmlns:a16="http://schemas.microsoft.com/office/drawing/2014/main" id="{A06B37DB-4FA1-F2FE-5F48-EC8CCD83353A}"/>
+              </a:ext>
+            </a:extLst>
+          </p:cNvPr>
+          <p:cNvSpPr>
+            <a:spLocks noGrp="1"/>
+          </p:cNvSpPr>
+          <p:nvPr>
+            <p:ph type="title"/>
+          </p:nvPr>
+        </p:nvSpPr>
+        <p:spPr/>
+        <p:txBody>
+          <a:bodyPr/>
+          <a:lstStyle/>
+          <a:p>
+            <a:r>
+              <a:rPr lang="en-US" dirty="0"/>
+              <a:t>Background  </a:t>
+            </a:r>
+            <a:endParaRPr lang="en-AU" dirty="0"/>
+          </a:p>
+        </p:txBody>
+      </p:sp>
+      <p:sp>
+        <p:nvSpPr>
+          <p:cNvPr id="3" name="Content Placeholder 2">
+            <a:extLst>
+              <a:ext uri="{FF2B5EF4-FFF2-40B4-BE49-F238E27FC236}">
+                <a16:creationId xmlns:a16="http://schemas.microsoft.com/office/drawing/2014/main" id="{534FCC26-E232-AF3A-5BB8-150BCF7ED7CF}"/>
+              </a:ext>
+            </a:extLst>
+          </p:cNvPr>
+          <p:cNvSpPr>
+            <a:spLocks noGrp="1"/>
+          </p:cNvSpPr>
+          <p:nvPr>
+            <p:ph idx="1"/>
+          </p:nvPr>
+        </p:nvSpPr>
+        <p:spPr>
+          <a:xfrm>
+            <a:off x="0" y="2214154"/>
+            <a:ext cx="7696206" cy="4119971"/>
+          </a:xfrm>
+        </p:spPr>
+        <p:txBody>
+          <a:bodyPr/>
+          <a:lstStyle/>
+          <a:p>
+            <a:r>
+              <a:rPr lang="en-US" dirty="0"/>
+              <a:t>There seems to be an uneven distribution of mutations. </a:t>
+            </a:r>
+            <a:r>
+              <a:rPr lang="en-AU" dirty="0"/>
+              <a:t>Results from the E. coli, A. baylyi and L. plantarum screens show that some mutations are much more favoured than others or we simply see more of them </a:t>
+            </a:r>
+          </a:p>
+          <a:p>
+            <a:r>
+              <a:rPr lang="en-AU" dirty="0"/>
+              <a:t>Mutants that appear from mutant screens are stochastic </a:t>
+            </a:r>
+          </a:p>
+          <a:p>
+            <a:r>
+              <a:rPr lang="en-AU" dirty="0"/>
+              <a:t>I want to test to see if establishment is also stochastic or if there are certain factors during this phase that is causing the distribution that we see </a:t>
+            </a:r>
+          </a:p>
+          <a:p>
+            <a:endParaRPr lang="en-AU" dirty="0"/>
+          </a:p>
+        </p:txBody>
+      </p:sp>
+      <p:pic>
+        <p:nvPicPr>
+          <p:cNvPr id="5" name="Picture 4">
+            <a:extLst>
+              <a:ext uri="{FF2B5EF4-FFF2-40B4-BE49-F238E27FC236}">
+                <a16:creationId xmlns:a16="http://schemas.microsoft.com/office/drawing/2014/main" id="{FA0D7431-6010-E1F1-25A6-7FC9349E6B9E}"/>
+              </a:ext>
+            </a:extLst>
+          </p:cNvPr>
+          <p:cNvPicPr>
+            <a:picLocks noChangeAspect="1"/>
+          </p:cNvPicPr>
+          <p:nvPr/>
+        </p:nvPicPr>
+        <p:blipFill>
+          <a:blip r:embed="rId3"/>
+          <a:stretch>
+            <a:fillRect/>
+          </a:stretch>
+        </p:blipFill>
+        <p:spPr>
+          <a:xfrm>
+            <a:off x="7696206" y="78377"/>
+            <a:ext cx="3433829" cy="6609806"/>
+          </a:xfrm>
+          <a:prstGeom prst="rect">
+            <a:avLst/>
+          </a:prstGeom>
+        </p:spPr>
+      </p:pic>
+    </p:spTree>
+    <p:extLst>
+      <p:ext uri="{BB962C8B-B14F-4D97-AF65-F5344CB8AC3E}">
+        <p14:creationId xmlns:p14="http://schemas.microsoft.com/office/powerpoint/2010/main" val="1684150992"/>
+      </p:ext>
+    </p:extLst>
+  </p:cSld>
+  <p:clrMapOvr>
+    <a:masterClrMapping/>
+  </p:clrMapOvr>
+</p:sld>
+</file>
+
+<file path=ppt/slides/slide13.xml><?xml version="1.0" encoding="utf-8"?>
+<p:sld xmlns:a="http://schemas.openxmlformats.org/drawingml/2006/main" xmlns:r="http://schemas.openxmlformats.org/officeDocument/2006/relationships" xmlns:p="http://schemas.openxmlformats.org/presentationml/2006/main">
+  <p:cSld>
+    <p:spTree>
+      <p:nvGrpSpPr>
+        <p:cNvPr id="1" name=""/>
+        <p:cNvGrpSpPr/>
+        <p:nvPr/>
+      </p:nvGrpSpPr>
+      <p:grpSpPr>
+        <a:xfrm>
+          <a:off x="0" y="0"/>
+          <a:ext cx="0" cy="0"/>
+          <a:chOff x="0" y="0"/>
+          <a:chExt cx="0" cy="0"/>
+        </a:xfrm>
+      </p:grpSpPr>
+      <p:sp>
+        <p:nvSpPr>
+          <p:cNvPr id="2" name="Title 1">
+            <a:extLst>
+              <a:ext uri="{FF2B5EF4-FFF2-40B4-BE49-F238E27FC236}">
+                <a16:creationId xmlns:a16="http://schemas.microsoft.com/office/drawing/2014/main" id="{DABAD99A-664F-5DE6-6183-D779E8630786}"/>
+              </a:ext>
+            </a:extLst>
+          </p:cNvPr>
+          <p:cNvSpPr>
+            <a:spLocks noGrp="1"/>
+          </p:cNvSpPr>
+          <p:nvPr>
+            <p:ph type="title"/>
+          </p:nvPr>
+        </p:nvSpPr>
+        <p:spPr/>
+        <p:txBody>
+          <a:bodyPr/>
+          <a:lstStyle/>
+          <a:p>
+            <a:r>
+              <a:rPr lang="en-US" dirty="0"/>
+              <a:t>Design </a:t>
+            </a:r>
+            <a:endParaRPr lang="en-AU" dirty="0"/>
+          </a:p>
+        </p:txBody>
+      </p:sp>
+      <p:sp>
+        <p:nvSpPr>
+          <p:cNvPr id="3" name="Content Placeholder 2">
+            <a:extLst>
+              <a:ext uri="{FF2B5EF4-FFF2-40B4-BE49-F238E27FC236}">
+                <a16:creationId xmlns:a16="http://schemas.microsoft.com/office/drawing/2014/main" id="{DA16E06F-F081-53A3-84A4-2A6ED0ED5996}"/>
+              </a:ext>
+            </a:extLst>
+          </p:cNvPr>
+          <p:cNvSpPr>
+            <a:spLocks noGrp="1"/>
+          </p:cNvSpPr>
+          <p:nvPr>
+            <p:ph idx="1"/>
+          </p:nvPr>
+        </p:nvSpPr>
+        <p:spPr>
+          <a:xfrm>
+            <a:off x="1261872" y="1828801"/>
+            <a:ext cx="6262878" cy="4191000"/>
+          </a:xfrm>
+        </p:spPr>
+        <p:txBody>
+          <a:bodyPr/>
+          <a:lstStyle/>
+          <a:p>
+            <a:r>
+              <a:rPr lang="en-US" dirty="0"/>
+              <a:t>Pick a rare mutant  </a:t>
+            </a:r>
+          </a:p>
+          <a:p>
+            <a:r>
+              <a:rPr lang="en-US" dirty="0"/>
+              <a:t>Pick an abundant mutant </a:t>
+            </a:r>
+          </a:p>
+          <a:p>
+            <a:r>
+              <a:rPr lang="en-US" dirty="0"/>
+              <a:t>Pick a mutant somewhere in the middle  </a:t>
+            </a:r>
+          </a:p>
+          <a:p>
+            <a:r>
+              <a:rPr lang="en-US" dirty="0"/>
+              <a:t>Pick the WT </a:t>
+            </a:r>
+          </a:p>
+          <a:p>
+            <a:r>
+              <a:rPr lang="en-US" dirty="0"/>
+              <a:t>Grow over many repetitions on LB and RIF plates              to see if there is a difference in the number of colonies that appear </a:t>
+            </a:r>
+            <a:endParaRPr lang="en-AU" dirty="0"/>
+          </a:p>
+        </p:txBody>
+      </p:sp>
+      <p:pic>
+        <p:nvPicPr>
+          <p:cNvPr id="4" name="Picture 3">
+            <a:extLst>
+              <a:ext uri="{FF2B5EF4-FFF2-40B4-BE49-F238E27FC236}">
+                <a16:creationId xmlns:a16="http://schemas.microsoft.com/office/drawing/2014/main" id="{F52AA396-A85B-B182-1509-77A7F6B12182}"/>
+              </a:ext>
+            </a:extLst>
+          </p:cNvPr>
+          <p:cNvPicPr>
+            <a:picLocks noChangeAspect="1"/>
+          </p:cNvPicPr>
+          <p:nvPr/>
+        </p:nvPicPr>
+        <p:blipFill>
+          <a:blip r:embed="rId3"/>
+          <a:stretch>
+            <a:fillRect/>
+          </a:stretch>
+        </p:blipFill>
+        <p:spPr>
+          <a:xfrm>
+            <a:off x="7696206" y="78377"/>
+            <a:ext cx="3433829" cy="6609806"/>
+          </a:xfrm>
+          <a:prstGeom prst="rect">
+            <a:avLst/>
+          </a:prstGeom>
+        </p:spPr>
+      </p:pic>
+    </p:spTree>
+    <p:extLst>
+      <p:ext uri="{BB962C8B-B14F-4D97-AF65-F5344CB8AC3E}">
+        <p14:creationId xmlns:p14="http://schemas.microsoft.com/office/powerpoint/2010/main" val="4135181532"/>
+      </p:ext>
+    </p:extLst>
+  </p:cSld>
+  <p:clrMapOvr>
+    <a:masterClrMapping/>
+  </p:clrMapOvr>
+</p:sld>
+</file>
+
+<file path=ppt/slides/slide14.xml><?xml version="1.0" encoding="utf-8"?>
+<p:sld xmlns:a="http://schemas.openxmlformats.org/drawingml/2006/main" xmlns:r="http://schemas.openxmlformats.org/officeDocument/2006/relationships" xmlns:p="http://schemas.openxmlformats.org/presentationml/2006/main">
+  <p:cSld>
+    <p:spTree>
+      <p:nvGrpSpPr>
+        <p:cNvPr id="1" name=""/>
+        <p:cNvGrpSpPr/>
+        <p:nvPr/>
+      </p:nvGrpSpPr>
+      <p:grpSpPr>
+        <a:xfrm>
+          <a:off x="0" y="0"/>
+          <a:ext cx="0" cy="0"/>
+          <a:chOff x="0" y="0"/>
+          <a:chExt cx="0" cy="0"/>
+        </a:xfrm>
+      </p:grpSpPr>
+      <p:sp>
+        <p:nvSpPr>
+          <p:cNvPr id="2" name="Title 1">
+            <a:extLst>
+              <a:ext uri="{FF2B5EF4-FFF2-40B4-BE49-F238E27FC236}">
+                <a16:creationId xmlns:a16="http://schemas.microsoft.com/office/drawing/2014/main" id="{B18E2FA7-3528-B5F6-DCC3-6380A3F928B8}"/>
+              </a:ext>
+            </a:extLst>
+          </p:cNvPr>
+          <p:cNvSpPr>
+            <a:spLocks noGrp="1"/>
+          </p:cNvSpPr>
+          <p:nvPr>
+            <p:ph type="title"/>
+          </p:nvPr>
+        </p:nvSpPr>
+        <p:spPr/>
+        <p:txBody>
+          <a:bodyPr/>
+          <a:lstStyle/>
+          <a:p>
+            <a:r>
+              <a:rPr lang="en-US" dirty="0"/>
+              <a:t>Initial Experiment </a:t>
+            </a:r>
+            <a:endParaRPr lang="en-AU" dirty="0"/>
+          </a:p>
+        </p:txBody>
+      </p:sp>
+      <p:pic>
+        <p:nvPicPr>
+          <p:cNvPr id="8" name="Content Placeholder 7">
+            <a:extLst>
+              <a:ext uri="{FF2B5EF4-FFF2-40B4-BE49-F238E27FC236}">
+                <a16:creationId xmlns:a16="http://schemas.microsoft.com/office/drawing/2014/main" id="{9EB8DF53-DD2A-7EC6-EEE9-2BA24FC5B165}"/>
+              </a:ext>
+            </a:extLst>
+          </p:cNvPr>
+          <p:cNvPicPr>
+            <a:picLocks noGrp="1" noChangeAspect="1"/>
+          </p:cNvPicPr>
+          <p:nvPr>
+            <p:ph idx="1"/>
+          </p:nvPr>
+        </p:nvPicPr>
+        <p:blipFill>
+          <a:blip r:embed="rId3">
+            <a:extLst>
+              <a:ext uri="{28A0092B-C50C-407E-A947-70E740481C1C}">
+                <a14:useLocalDpi xmlns:a14="http://schemas.microsoft.com/office/drawing/2010/main" val="0"/>
+              </a:ext>
+            </a:extLst>
+          </a:blip>
+          <a:stretch>
+            <a:fillRect/>
+          </a:stretch>
+        </p:blipFill>
+        <p:spPr>
+          <a:xfrm rot="16200000">
+            <a:off x="3759044" y="1270977"/>
+            <a:ext cx="4673912" cy="6231884"/>
+          </a:xfrm>
+          <a:prstGeom prst="rect">
+            <a:avLst/>
+          </a:prstGeom>
+        </p:spPr>
+      </p:pic>
+    </p:spTree>
+    <p:extLst>
+      <p:ext uri="{BB962C8B-B14F-4D97-AF65-F5344CB8AC3E}">
+        <p14:creationId xmlns:p14="http://schemas.microsoft.com/office/powerpoint/2010/main" val="161381395"/>
+      </p:ext>
+    </p:extLst>
+  </p:cSld>
+  <p:clrMapOvr>
+    <a:masterClrMapping/>
+  </p:clrMapOvr>
+</p:sld>
+</file>
+
+<file path=ppt/slides/slide15.xml><?xml version="1.0" encoding="utf-8"?>
+<p:sld xmlns:a="http://schemas.openxmlformats.org/drawingml/2006/main" xmlns:r="http://schemas.openxmlformats.org/officeDocument/2006/relationships" xmlns:p="http://schemas.openxmlformats.org/presentationml/2006/main">
+  <p:cSld>
+    <p:spTree>
+      <p:nvGrpSpPr>
+        <p:cNvPr id="1" name=""/>
+        <p:cNvGrpSpPr/>
+        <p:nvPr/>
+      </p:nvGrpSpPr>
+      <p:grpSpPr>
+        <a:xfrm>
+          <a:off x="0" y="0"/>
+          <a:ext cx="0" cy="0"/>
+          <a:chOff x="0" y="0"/>
+          <a:chExt cx="0" cy="0"/>
+        </a:xfrm>
+      </p:grpSpPr>
+      <p:sp>
+        <p:nvSpPr>
+          <p:cNvPr id="2" name="Title 1">
+            <a:extLst>
+              <a:ext uri="{FF2B5EF4-FFF2-40B4-BE49-F238E27FC236}">
+                <a16:creationId xmlns:a16="http://schemas.microsoft.com/office/drawing/2014/main" id="{1CB5020F-9C20-B7A9-E41A-55AAE3D5476A}"/>
+              </a:ext>
+            </a:extLst>
+          </p:cNvPr>
+          <p:cNvSpPr>
+            <a:spLocks noGrp="1"/>
+          </p:cNvSpPr>
+          <p:nvPr>
+            <p:ph type="title"/>
+          </p:nvPr>
+        </p:nvSpPr>
+        <p:spPr/>
+        <p:txBody>
+          <a:bodyPr/>
+          <a:lstStyle/>
+          <a:p>
+            <a:r>
+              <a:rPr lang="en-US" dirty="0"/>
+              <a:t>What literature suggests</a:t>
+            </a:r>
+            <a:endParaRPr lang="en-AU" dirty="0"/>
+          </a:p>
+        </p:txBody>
+      </p:sp>
+      <p:sp>
+        <p:nvSpPr>
+          <p:cNvPr id="3" name="Content Placeholder 2">
+            <a:extLst>
+              <a:ext uri="{FF2B5EF4-FFF2-40B4-BE49-F238E27FC236}">
+                <a16:creationId xmlns:a16="http://schemas.microsoft.com/office/drawing/2014/main" id="{DEB5D11C-73B4-CF12-50B3-6C4805004ADA}"/>
+              </a:ext>
+            </a:extLst>
+          </p:cNvPr>
+          <p:cNvSpPr>
+            <a:spLocks noGrp="1"/>
+          </p:cNvSpPr>
+          <p:nvPr>
+            <p:ph idx="1"/>
+          </p:nvPr>
+        </p:nvSpPr>
+        <p:spPr/>
+        <p:txBody>
+          <a:bodyPr/>
+          <a:lstStyle/>
+          <a:p>
+            <a:pPr lvl="0"/>
+            <a:r>
+              <a:rPr lang="en-US" dirty="0"/>
+              <a:t>Stochasticity </a:t>
+            </a:r>
+            <a:endParaRPr lang="en-AU" dirty="0"/>
+          </a:p>
+          <a:p>
+            <a:pPr lvl="0"/>
+            <a:r>
+              <a:rPr lang="en-US" dirty="0"/>
+              <a:t>Inoculum size </a:t>
+            </a:r>
+            <a:endParaRPr lang="en-AU" dirty="0"/>
+          </a:p>
+          <a:p>
+            <a:pPr lvl="0"/>
+            <a:r>
+              <a:rPr lang="en-AU" dirty="0"/>
+              <a:t>High mutational accessibility </a:t>
+            </a:r>
+          </a:p>
+          <a:p>
+            <a:pPr lvl="0"/>
+            <a:r>
+              <a:rPr lang="en-AU" dirty="0"/>
+              <a:t>Compensatory mutations</a:t>
+            </a:r>
+          </a:p>
+          <a:p>
+            <a:endParaRPr lang="en-AU" dirty="0"/>
+          </a:p>
+        </p:txBody>
+      </p:sp>
+      <p:pic>
+        <p:nvPicPr>
+          <p:cNvPr id="5" name="Picture 4">
+            <a:extLst>
+              <a:ext uri="{FF2B5EF4-FFF2-40B4-BE49-F238E27FC236}">
+                <a16:creationId xmlns:a16="http://schemas.microsoft.com/office/drawing/2014/main" id="{D509EA64-CD86-7F76-4243-83A2503D14D2}"/>
+              </a:ext>
+            </a:extLst>
+          </p:cNvPr>
+          <p:cNvPicPr>
+            <a:picLocks noChangeAspect="1"/>
+          </p:cNvPicPr>
+          <p:nvPr/>
+        </p:nvPicPr>
+        <p:blipFill>
+          <a:blip r:embed="rId3"/>
+          <a:stretch>
+            <a:fillRect/>
+          </a:stretch>
+        </p:blipFill>
+        <p:spPr>
+          <a:xfrm>
+            <a:off x="5936951" y="1691322"/>
+            <a:ext cx="5198777" cy="5033736"/>
+          </a:xfrm>
+          <a:prstGeom prst="rect">
+            <a:avLst/>
+          </a:prstGeom>
+        </p:spPr>
+      </p:pic>
+    </p:spTree>
+    <p:extLst>
+      <p:ext uri="{BB962C8B-B14F-4D97-AF65-F5344CB8AC3E}">
+        <p14:creationId xmlns:p14="http://schemas.microsoft.com/office/powerpoint/2010/main" val="553690055"/>
+      </p:ext>
+    </p:extLst>
+  </p:cSld>
+  <p:clrMapOvr>
+    <a:masterClrMapping/>
+  </p:clrMapOvr>
+</p:sld>
+</file>
+
+<file path=ppt/slides/slide16.xml><?xml version="1.0" encoding="utf-8"?>
+<p:sld xmlns:a="http://schemas.openxmlformats.org/drawingml/2006/main" xmlns:r="http://schemas.openxmlformats.org/officeDocument/2006/relationships" xmlns:p="http://schemas.openxmlformats.org/presentationml/2006/main">
+  <p:cSld>
+    <p:spTree>
+      <p:nvGrpSpPr>
+        <p:cNvPr id="1" name=""/>
+        <p:cNvGrpSpPr/>
+        <p:nvPr/>
+      </p:nvGrpSpPr>
+      <p:grpSpPr>
+        <a:xfrm>
+          <a:off x="0" y="0"/>
+          <a:ext cx="0" cy="0"/>
+          <a:chOff x="0" y="0"/>
+          <a:chExt cx="0" cy="0"/>
+        </a:xfrm>
+      </p:grpSpPr>
+      <p:sp>
+        <p:nvSpPr>
+          <p:cNvPr id="3" name="Content Placeholder 2">
+            <a:extLst>
+              <a:ext uri="{FF2B5EF4-FFF2-40B4-BE49-F238E27FC236}">
+                <a16:creationId xmlns:a16="http://schemas.microsoft.com/office/drawing/2014/main" id="{B7BAAE90-231D-70F2-9B56-962B834D014F}"/>
+              </a:ext>
+            </a:extLst>
+          </p:cNvPr>
+          <p:cNvSpPr>
+            <a:spLocks noGrp="1"/>
+          </p:cNvSpPr>
+          <p:nvPr>
+            <p:ph idx="1"/>
+          </p:nvPr>
+        </p:nvSpPr>
+        <p:spPr/>
+        <p:txBody>
+          <a:bodyPr/>
+          <a:lstStyle/>
+          <a:p>
+            <a:pPr marL="0" indent="0">
+              <a:buNone/>
+            </a:pPr>
+            <a:r>
+              <a:rPr lang="en-US" dirty="0"/>
+              <a:t>1. </a:t>
+            </a:r>
+            <a:r>
+              <a:rPr lang="en-US" dirty="0" err="1"/>
+              <a:t>Bolourchi</a:t>
+            </a:r>
+            <a:r>
+              <a:rPr lang="en-US" dirty="0"/>
+              <a:t>, N., Brown, C. R. P., Letten, A. D., &amp; </a:t>
+            </a:r>
+            <a:r>
+              <a:rPr lang="en-US" dirty="0" err="1"/>
+              <a:t>Engelstädter</a:t>
+            </a:r>
+            <a:r>
+              <a:rPr lang="en-US" dirty="0"/>
+              <a:t>, J. (2024). </a:t>
+            </a:r>
+            <a:r>
+              <a:rPr lang="en-US" i="1" dirty="0"/>
+              <a:t>Evolution and evolvability of rifampicin resistance across the bacterial tree of life</a:t>
+            </a:r>
+            <a:r>
+              <a:rPr lang="en-US" dirty="0"/>
+              <a:t>. Evolutionary Biology. </a:t>
+            </a:r>
+            <a:r>
+              <a:rPr lang="en-US" dirty="0">
+                <a:hlinkClick r:id="rId2"/>
+              </a:rPr>
+              <a:t>https://doi.org/10.1101/2024.11.05.622190</a:t>
+            </a:r>
+            <a:endParaRPr lang="en-US" dirty="0"/>
+          </a:p>
+          <a:p>
+            <a:endParaRPr lang="en-AU" dirty="0"/>
+          </a:p>
+        </p:txBody>
+      </p:sp>
+    </p:spTree>
+    <p:extLst>
+      <p:ext uri="{BB962C8B-B14F-4D97-AF65-F5344CB8AC3E}">
+        <p14:creationId xmlns:p14="http://schemas.microsoft.com/office/powerpoint/2010/main" val="636768404"/>
+      </p:ext>
+    </p:extLst>
+  </p:cSld>
+  <p:clrMapOvr>
+    <a:masterClrMapping/>
+  </p:clrMapOvr>
+</p:sld>
+</file>
+
+<file path=ppt/slides/slide17.xml><?xml version="1.0" encoding="utf-8"?>
+<p:sld xmlns:a="http://schemas.openxmlformats.org/drawingml/2006/main" xmlns:r="http://schemas.openxmlformats.org/officeDocument/2006/relationships" xmlns:p="http://schemas.openxmlformats.org/presentationml/2006/main">
+  <p:cSld>
+    <p:spTree>
+      <p:nvGrpSpPr>
+        <p:cNvPr id="1" name=""/>
+        <p:cNvGrpSpPr/>
+        <p:nvPr/>
+      </p:nvGrpSpPr>
+      <p:grpSpPr>
+        <a:xfrm>
+          <a:off x="0" y="0"/>
+          <a:ext cx="0" cy="0"/>
+          <a:chOff x="0" y="0"/>
+          <a:chExt cx="0" cy="0"/>
+        </a:xfrm>
+      </p:grpSpPr>
+      <p:sp>
+        <p:nvSpPr>
           <p:cNvPr id="6" name="Title 1">
             <a:extLst>
               <a:ext uri="{FF2B5EF4-FFF2-40B4-BE49-F238E27FC236}">
@@ -6230,7 +7238,7 @@
 </p:sld>
 </file>
 
-<file path=ppt/slides/slide12.xml><?xml version="1.0" encoding="utf-8"?>
+<file path=ppt/slides/slide18.xml><?xml version="1.0" encoding="utf-8"?>
 <p:sld xmlns:a="http://schemas.openxmlformats.org/drawingml/2006/main" xmlns:r="http://schemas.openxmlformats.org/officeDocument/2006/relationships" xmlns:p="http://schemas.openxmlformats.org/presentationml/2006/main">
   <p:cSld>
     <p:spTree>
@@ -6321,7 +7329,7 @@
 </p:sld>
 </file>
 
-<file path=ppt/slides/slide13.xml><?xml version="1.0" encoding="utf-8"?>
+<file path=ppt/slides/slide19.xml><?xml version="1.0" encoding="utf-8"?>
 <p:sld xmlns:a="http://schemas.openxmlformats.org/drawingml/2006/main" xmlns:r="http://schemas.openxmlformats.org/officeDocument/2006/relationships" xmlns:p="http://schemas.openxmlformats.org/presentationml/2006/main">
   <p:cSld>
     <p:spTree>
@@ -6435,7 +7443,133 @@
 </p:sld>
 </file>
 
-<file path=ppt/slides/slide14.xml><?xml version="1.0" encoding="utf-8"?>
+<file path=ppt/slides/slide2.xml><?xml version="1.0" encoding="utf-8"?>
+<p:sld xmlns:a="http://schemas.openxmlformats.org/drawingml/2006/main" xmlns:r="http://schemas.openxmlformats.org/officeDocument/2006/relationships" xmlns:p="http://schemas.openxmlformats.org/presentationml/2006/main">
+  <p:cSld>
+    <p:spTree>
+      <p:nvGrpSpPr>
+        <p:cNvPr id="1" name=""/>
+        <p:cNvGrpSpPr/>
+        <p:nvPr/>
+      </p:nvGrpSpPr>
+      <p:grpSpPr>
+        <a:xfrm>
+          <a:off x="0" y="0"/>
+          <a:ext cx="0" cy="0"/>
+          <a:chOff x="0" y="0"/>
+          <a:chExt cx="0" cy="0"/>
+        </a:xfrm>
+      </p:grpSpPr>
+      <p:sp>
+        <p:nvSpPr>
+          <p:cNvPr id="2" name="Title 1">
+            <a:extLst>
+              <a:ext uri="{FF2B5EF4-FFF2-40B4-BE49-F238E27FC236}">
+                <a16:creationId xmlns:a16="http://schemas.microsoft.com/office/drawing/2014/main" id="{53FEA34F-6776-B085-331E-74C0279DCB4D}"/>
+              </a:ext>
+            </a:extLst>
+          </p:cNvPr>
+          <p:cNvSpPr>
+            <a:spLocks noGrp="1"/>
+          </p:cNvSpPr>
+          <p:nvPr>
+            <p:ph type="title"/>
+          </p:nvPr>
+        </p:nvSpPr>
+        <p:spPr/>
+        <p:txBody>
+          <a:bodyPr/>
+          <a:lstStyle/>
+          <a:p>
+            <a:r>
+              <a:rPr lang="en-US" dirty="0"/>
+              <a:t>Chapter 1 </a:t>
+            </a:r>
+            <a:endParaRPr lang="en-AU" dirty="0"/>
+          </a:p>
+        </p:txBody>
+      </p:sp>
+      <p:sp>
+        <p:nvSpPr>
+          <p:cNvPr id="3" name="Content Placeholder 2">
+            <a:extLst>
+              <a:ext uri="{FF2B5EF4-FFF2-40B4-BE49-F238E27FC236}">
+                <a16:creationId xmlns:a16="http://schemas.microsoft.com/office/drawing/2014/main" id="{CA4F29F4-AEB2-D0FB-3CE6-20070AD29B70}"/>
+              </a:ext>
+            </a:extLst>
+          </p:cNvPr>
+          <p:cNvSpPr>
+            <a:spLocks noGrp="1"/>
+          </p:cNvSpPr>
+          <p:nvPr>
+            <p:ph idx="1"/>
+          </p:nvPr>
+        </p:nvSpPr>
+        <p:spPr/>
+        <p:txBody>
+          <a:bodyPr/>
+          <a:lstStyle/>
+          <a:p>
+            <a:r>
+              <a:rPr lang="en-US" dirty="0"/>
+              <a:t>Looking at the fitness effect of E. coli with </a:t>
+            </a:r>
+            <a:r>
+              <a:rPr lang="en-US" dirty="0" err="1"/>
+              <a:t>rpoB</a:t>
+            </a:r>
+            <a:r>
+              <a:rPr lang="en-US" dirty="0"/>
+              <a:t> mutations from our lab </a:t>
+            </a:r>
+          </a:p>
+          <a:p>
+            <a:r>
+              <a:rPr lang="en-US" dirty="0"/>
+              <a:t>Growing them across a wide temperature spectrum ideally from 22</a:t>
+            </a:r>
+            <a:r>
+              <a:rPr lang="en-AU" dirty="0"/>
+              <a:t>°C</a:t>
+            </a:r>
+            <a:r>
+              <a:rPr lang="en-US" dirty="0"/>
+              <a:t>-42</a:t>
+            </a:r>
+            <a:r>
+              <a:rPr lang="en-AU" dirty="0"/>
+              <a:t>°C</a:t>
+            </a:r>
+          </a:p>
+          <a:p>
+            <a:r>
+              <a:rPr lang="en-AU" dirty="0"/>
+              <a:t>Also across two types of media LB and M9 </a:t>
+            </a:r>
+            <a:endParaRPr lang="en-US" dirty="0"/>
+          </a:p>
+          <a:p>
+            <a:endParaRPr lang="en-US" dirty="0"/>
+          </a:p>
+          <a:p>
+            <a:endParaRPr lang="en-AU" dirty="0"/>
+          </a:p>
+        </p:txBody>
+      </p:sp>
+    </p:spTree>
+    <p:extLst>
+      <p:ext uri="{BB962C8B-B14F-4D97-AF65-F5344CB8AC3E}">
+        <p14:creationId xmlns:p14="http://schemas.microsoft.com/office/powerpoint/2010/main" val="2040666385"/>
+      </p:ext>
+    </p:extLst>
+  </p:cSld>
+  <p:clrMapOvr>
+    <a:masterClrMapping/>
+  </p:clrMapOvr>
+</p:sld>
+</file>
+
+<file path=ppt/slides/slide20.xml><?xml version="1.0" encoding="utf-8"?>
 <p:sld xmlns:a="http://schemas.openxmlformats.org/drawingml/2006/main" xmlns:r="http://schemas.openxmlformats.org/officeDocument/2006/relationships" xmlns:p="http://schemas.openxmlformats.org/presentationml/2006/main">
   <p:cSld>
     <p:spTree>
@@ -6517,698 +7651,6 @@
     <p:extLst>
       <p:ext uri="{BB962C8B-B14F-4D97-AF65-F5344CB8AC3E}">
         <p14:creationId xmlns:p14="http://schemas.microsoft.com/office/powerpoint/2010/main" val="446253618"/>
-      </p:ext>
-    </p:extLst>
-  </p:cSld>
-  <p:clrMapOvr>
-    <a:masterClrMapping/>
-  </p:clrMapOvr>
-</p:sld>
-</file>
-
-<file path=ppt/slides/slide15.xml><?xml version="1.0" encoding="utf-8"?>
-<p:sld xmlns:a="http://schemas.openxmlformats.org/drawingml/2006/main" xmlns:r="http://schemas.openxmlformats.org/officeDocument/2006/relationships" xmlns:p="http://schemas.openxmlformats.org/presentationml/2006/main">
-  <p:cSld>
-    <p:spTree>
-      <p:nvGrpSpPr>
-        <p:cNvPr id="1" name=""/>
-        <p:cNvGrpSpPr/>
-        <p:nvPr/>
-      </p:nvGrpSpPr>
-      <p:grpSpPr>
-        <a:xfrm>
-          <a:off x="0" y="0"/>
-          <a:ext cx="0" cy="0"/>
-          <a:chOff x="0" y="0"/>
-          <a:chExt cx="0" cy="0"/>
-        </a:xfrm>
-      </p:grpSpPr>
-      <p:sp>
-        <p:nvSpPr>
-          <p:cNvPr id="2" name="Title 1">
-            <a:extLst>
-              <a:ext uri="{FF2B5EF4-FFF2-40B4-BE49-F238E27FC236}">
-                <a16:creationId xmlns:a16="http://schemas.microsoft.com/office/drawing/2014/main" id="{B072C49B-7743-4ECA-4DFC-2A36B9C11C83}"/>
-              </a:ext>
-            </a:extLst>
-          </p:cNvPr>
-          <p:cNvSpPr>
-            <a:spLocks noGrp="1"/>
-          </p:cNvSpPr>
-          <p:nvPr>
-            <p:ph type="title"/>
-          </p:nvPr>
-        </p:nvSpPr>
-        <p:spPr/>
-        <p:txBody>
-          <a:bodyPr/>
-          <a:lstStyle/>
-          <a:p>
-            <a:r>
-              <a:rPr lang="en-US" dirty="0"/>
-              <a:t>Chapter 2 </a:t>
-            </a:r>
-            <a:endParaRPr lang="en-AU" dirty="0"/>
-          </a:p>
-        </p:txBody>
-      </p:sp>
-      <p:sp>
-        <p:nvSpPr>
-          <p:cNvPr id="3" name="Content Placeholder 2">
-            <a:extLst>
-              <a:ext uri="{FF2B5EF4-FFF2-40B4-BE49-F238E27FC236}">
-                <a16:creationId xmlns:a16="http://schemas.microsoft.com/office/drawing/2014/main" id="{FFD0EB59-5046-2900-FE7E-DA5B4AD35E16}"/>
-              </a:ext>
-            </a:extLst>
-          </p:cNvPr>
-          <p:cNvSpPr>
-            <a:spLocks noGrp="1"/>
-          </p:cNvSpPr>
-          <p:nvPr>
-            <p:ph idx="1"/>
-          </p:nvPr>
-        </p:nvSpPr>
-        <p:spPr/>
-        <p:txBody>
-          <a:bodyPr/>
-          <a:lstStyle/>
-          <a:p>
-            <a:r>
-              <a:rPr lang="en-US" dirty="0"/>
-              <a:t>Looking at the mortality of RIFR mutants when plated on RIF plates and if it correlates with mutation rates</a:t>
-            </a:r>
-            <a:endParaRPr lang="en-AU" dirty="0"/>
-          </a:p>
-        </p:txBody>
-      </p:sp>
-    </p:spTree>
-    <p:extLst>
-      <p:ext uri="{BB962C8B-B14F-4D97-AF65-F5344CB8AC3E}">
-        <p14:creationId xmlns:p14="http://schemas.microsoft.com/office/powerpoint/2010/main" val="2551635289"/>
-      </p:ext>
-    </p:extLst>
-  </p:cSld>
-  <p:clrMapOvr>
-    <a:masterClrMapping/>
-  </p:clrMapOvr>
-</p:sld>
-</file>
-
-<file path=ppt/slides/slide16.xml><?xml version="1.0" encoding="utf-8"?>
-<p:sld xmlns:a="http://schemas.openxmlformats.org/drawingml/2006/main" xmlns:r="http://schemas.openxmlformats.org/officeDocument/2006/relationships" xmlns:p="http://schemas.openxmlformats.org/presentationml/2006/main">
-  <p:cSld>
-    <p:spTree>
-      <p:nvGrpSpPr>
-        <p:cNvPr id="1" name=""/>
-        <p:cNvGrpSpPr/>
-        <p:nvPr/>
-      </p:nvGrpSpPr>
-      <p:grpSpPr>
-        <a:xfrm>
-          <a:off x="0" y="0"/>
-          <a:ext cx="0" cy="0"/>
-          <a:chOff x="0" y="0"/>
-          <a:chExt cx="0" cy="0"/>
-        </a:xfrm>
-      </p:grpSpPr>
-      <p:sp>
-        <p:nvSpPr>
-          <p:cNvPr id="2" name="Title 1">
-            <a:extLst>
-              <a:ext uri="{FF2B5EF4-FFF2-40B4-BE49-F238E27FC236}">
-                <a16:creationId xmlns:a16="http://schemas.microsoft.com/office/drawing/2014/main" id="{A06B37DB-4FA1-F2FE-5F48-EC8CCD83353A}"/>
-              </a:ext>
-            </a:extLst>
-          </p:cNvPr>
-          <p:cNvSpPr>
-            <a:spLocks noGrp="1"/>
-          </p:cNvSpPr>
-          <p:nvPr>
-            <p:ph type="title"/>
-          </p:nvPr>
-        </p:nvSpPr>
-        <p:spPr/>
-        <p:txBody>
-          <a:bodyPr/>
-          <a:lstStyle/>
-          <a:p>
-            <a:r>
-              <a:rPr lang="en-US" dirty="0"/>
-              <a:t>Background  </a:t>
-            </a:r>
-            <a:endParaRPr lang="en-AU" dirty="0"/>
-          </a:p>
-        </p:txBody>
-      </p:sp>
-      <p:sp>
-        <p:nvSpPr>
-          <p:cNvPr id="3" name="Content Placeholder 2">
-            <a:extLst>
-              <a:ext uri="{FF2B5EF4-FFF2-40B4-BE49-F238E27FC236}">
-                <a16:creationId xmlns:a16="http://schemas.microsoft.com/office/drawing/2014/main" id="{534FCC26-E232-AF3A-5BB8-150BCF7ED7CF}"/>
-              </a:ext>
-            </a:extLst>
-          </p:cNvPr>
-          <p:cNvSpPr>
-            <a:spLocks noGrp="1"/>
-          </p:cNvSpPr>
-          <p:nvPr>
-            <p:ph idx="1"/>
-          </p:nvPr>
-        </p:nvSpPr>
-        <p:spPr>
-          <a:xfrm>
-            <a:off x="0" y="2214154"/>
-            <a:ext cx="7696206" cy="4119971"/>
-          </a:xfrm>
-        </p:spPr>
-        <p:txBody>
-          <a:bodyPr/>
-          <a:lstStyle/>
-          <a:p>
-            <a:r>
-              <a:rPr lang="en-US" dirty="0"/>
-              <a:t>There is an uneven distribution of mutations. </a:t>
-            </a:r>
-            <a:r>
-              <a:rPr lang="en-AU"/>
-              <a:t>Results </a:t>
-            </a:r>
-            <a:r>
-              <a:rPr lang="en-AU" dirty="0"/>
-              <a:t>from the E. coli, A. </a:t>
-            </a:r>
-            <a:r>
-              <a:rPr lang="en-AU" dirty="0" err="1"/>
-              <a:t>baylyi</a:t>
-            </a:r>
-            <a:r>
-              <a:rPr lang="en-AU" dirty="0"/>
-              <a:t> and L. plantarum screens shows that some mutations are much more favoured than others or we simply see more of them </a:t>
-            </a:r>
-          </a:p>
-          <a:p>
-            <a:r>
-              <a:rPr lang="en-AU" dirty="0"/>
-              <a:t>Mutants isolated from mutant screes are stochastic </a:t>
-            </a:r>
-          </a:p>
-          <a:p>
-            <a:r>
-              <a:rPr lang="en-AU" dirty="0"/>
-              <a:t>The initial establishment of a certain mutant is stochastic </a:t>
-            </a:r>
-          </a:p>
-          <a:p>
-            <a:r>
-              <a:rPr lang="en-AU" dirty="0"/>
-              <a:t>The final selection for the mutant is unevenly distributed </a:t>
-            </a:r>
-          </a:p>
-          <a:p>
-            <a:endParaRPr lang="en-AU" dirty="0"/>
-          </a:p>
-        </p:txBody>
-      </p:sp>
-      <p:pic>
-        <p:nvPicPr>
-          <p:cNvPr id="5" name="Picture 4">
-            <a:extLst>
-              <a:ext uri="{FF2B5EF4-FFF2-40B4-BE49-F238E27FC236}">
-                <a16:creationId xmlns:a16="http://schemas.microsoft.com/office/drawing/2014/main" id="{FA0D7431-6010-E1F1-25A6-7FC9349E6B9E}"/>
-              </a:ext>
-            </a:extLst>
-          </p:cNvPr>
-          <p:cNvPicPr>
-            <a:picLocks noChangeAspect="1"/>
-          </p:cNvPicPr>
-          <p:nvPr/>
-        </p:nvPicPr>
-        <p:blipFill>
-          <a:blip r:embed="rId3"/>
-          <a:stretch>
-            <a:fillRect/>
-          </a:stretch>
-        </p:blipFill>
-        <p:spPr>
-          <a:xfrm>
-            <a:off x="7696206" y="78377"/>
-            <a:ext cx="3433829" cy="6609806"/>
-          </a:xfrm>
-          <a:prstGeom prst="rect">
-            <a:avLst/>
-          </a:prstGeom>
-        </p:spPr>
-      </p:pic>
-    </p:spTree>
-    <p:extLst>
-      <p:ext uri="{BB962C8B-B14F-4D97-AF65-F5344CB8AC3E}">
-        <p14:creationId xmlns:p14="http://schemas.microsoft.com/office/powerpoint/2010/main" val="1684150992"/>
-      </p:ext>
-    </p:extLst>
-  </p:cSld>
-  <p:clrMapOvr>
-    <a:masterClrMapping/>
-  </p:clrMapOvr>
-</p:sld>
-</file>
-
-<file path=ppt/slides/slide17.xml><?xml version="1.0" encoding="utf-8"?>
-<p:sld xmlns:a="http://schemas.openxmlformats.org/drawingml/2006/main" xmlns:r="http://schemas.openxmlformats.org/officeDocument/2006/relationships" xmlns:p="http://schemas.openxmlformats.org/presentationml/2006/main">
-  <p:cSld>
-    <p:spTree>
-      <p:nvGrpSpPr>
-        <p:cNvPr id="1" name=""/>
-        <p:cNvGrpSpPr/>
-        <p:nvPr/>
-      </p:nvGrpSpPr>
-      <p:grpSpPr>
-        <a:xfrm>
-          <a:off x="0" y="0"/>
-          <a:ext cx="0" cy="0"/>
-          <a:chOff x="0" y="0"/>
-          <a:chExt cx="0" cy="0"/>
-        </a:xfrm>
-      </p:grpSpPr>
-      <p:sp>
-        <p:nvSpPr>
-          <p:cNvPr id="2" name="Title 1">
-            <a:extLst>
-              <a:ext uri="{FF2B5EF4-FFF2-40B4-BE49-F238E27FC236}">
-                <a16:creationId xmlns:a16="http://schemas.microsoft.com/office/drawing/2014/main" id="{DABAD99A-664F-5DE6-6183-D779E8630786}"/>
-              </a:ext>
-            </a:extLst>
-          </p:cNvPr>
-          <p:cNvSpPr>
-            <a:spLocks noGrp="1"/>
-          </p:cNvSpPr>
-          <p:nvPr>
-            <p:ph type="title"/>
-          </p:nvPr>
-        </p:nvSpPr>
-        <p:spPr/>
-        <p:txBody>
-          <a:bodyPr/>
-          <a:lstStyle/>
-          <a:p>
-            <a:r>
-              <a:rPr lang="en-US" dirty="0"/>
-              <a:t>Design </a:t>
-            </a:r>
-            <a:endParaRPr lang="en-AU" dirty="0"/>
-          </a:p>
-        </p:txBody>
-      </p:sp>
-      <p:sp>
-        <p:nvSpPr>
-          <p:cNvPr id="3" name="Content Placeholder 2">
-            <a:extLst>
-              <a:ext uri="{FF2B5EF4-FFF2-40B4-BE49-F238E27FC236}">
-                <a16:creationId xmlns:a16="http://schemas.microsoft.com/office/drawing/2014/main" id="{DA16E06F-F081-53A3-84A4-2A6ED0ED5996}"/>
-              </a:ext>
-            </a:extLst>
-          </p:cNvPr>
-          <p:cNvSpPr>
-            <a:spLocks noGrp="1"/>
-          </p:cNvSpPr>
-          <p:nvPr>
-            <p:ph idx="1"/>
-          </p:nvPr>
-        </p:nvSpPr>
-        <p:spPr/>
-        <p:txBody>
-          <a:bodyPr/>
-          <a:lstStyle/>
-          <a:p>
-            <a:r>
-              <a:rPr lang="en-US" dirty="0"/>
-              <a:t>Pick a rare mutant  </a:t>
-            </a:r>
-          </a:p>
-          <a:p>
-            <a:r>
-              <a:rPr lang="en-US" dirty="0"/>
-              <a:t>Pick an abundant mutant </a:t>
-            </a:r>
-          </a:p>
-          <a:p>
-            <a:r>
-              <a:rPr lang="en-US" dirty="0"/>
-              <a:t>Pick a mutant somewhere in the middle  </a:t>
-            </a:r>
-          </a:p>
-          <a:p>
-            <a:r>
-              <a:rPr lang="en-US" dirty="0"/>
-              <a:t>Pick the WT </a:t>
-            </a:r>
-          </a:p>
-          <a:p>
-            <a:r>
-              <a:rPr lang="en-US" dirty="0"/>
-              <a:t>Grow over many repetitions and see if there is a               difference in difference in the number of colonies </a:t>
-            </a:r>
-            <a:endParaRPr lang="en-AU" dirty="0"/>
-          </a:p>
-        </p:txBody>
-      </p:sp>
-      <p:pic>
-        <p:nvPicPr>
-          <p:cNvPr id="4" name="Picture 3">
-            <a:extLst>
-              <a:ext uri="{FF2B5EF4-FFF2-40B4-BE49-F238E27FC236}">
-                <a16:creationId xmlns:a16="http://schemas.microsoft.com/office/drawing/2014/main" id="{F52AA396-A85B-B182-1509-77A7F6B12182}"/>
-              </a:ext>
-            </a:extLst>
-          </p:cNvPr>
-          <p:cNvPicPr>
-            <a:picLocks noChangeAspect="1"/>
-          </p:cNvPicPr>
-          <p:nvPr/>
-        </p:nvPicPr>
-        <p:blipFill>
-          <a:blip r:embed="rId3"/>
-          <a:stretch>
-            <a:fillRect/>
-          </a:stretch>
-        </p:blipFill>
-        <p:spPr>
-          <a:xfrm>
-            <a:off x="7696206" y="78377"/>
-            <a:ext cx="3433829" cy="6609806"/>
-          </a:xfrm>
-          <a:prstGeom prst="rect">
-            <a:avLst/>
-          </a:prstGeom>
-        </p:spPr>
-      </p:pic>
-    </p:spTree>
-    <p:extLst>
-      <p:ext uri="{BB962C8B-B14F-4D97-AF65-F5344CB8AC3E}">
-        <p14:creationId xmlns:p14="http://schemas.microsoft.com/office/powerpoint/2010/main" val="4135181532"/>
-      </p:ext>
-    </p:extLst>
-  </p:cSld>
-  <p:clrMapOvr>
-    <a:masterClrMapping/>
-  </p:clrMapOvr>
-</p:sld>
-</file>
-
-<file path=ppt/slides/slide18.xml><?xml version="1.0" encoding="utf-8"?>
-<p:sld xmlns:a="http://schemas.openxmlformats.org/drawingml/2006/main" xmlns:r="http://schemas.openxmlformats.org/officeDocument/2006/relationships" xmlns:p="http://schemas.openxmlformats.org/presentationml/2006/main">
-  <p:cSld>
-    <p:spTree>
-      <p:nvGrpSpPr>
-        <p:cNvPr id="1" name=""/>
-        <p:cNvGrpSpPr/>
-        <p:nvPr/>
-      </p:nvGrpSpPr>
-      <p:grpSpPr>
-        <a:xfrm>
-          <a:off x="0" y="0"/>
-          <a:ext cx="0" cy="0"/>
-          <a:chOff x="0" y="0"/>
-          <a:chExt cx="0" cy="0"/>
-        </a:xfrm>
-      </p:grpSpPr>
-      <p:sp>
-        <p:nvSpPr>
-          <p:cNvPr id="2" name="Title 1">
-            <a:extLst>
-              <a:ext uri="{FF2B5EF4-FFF2-40B4-BE49-F238E27FC236}">
-                <a16:creationId xmlns:a16="http://schemas.microsoft.com/office/drawing/2014/main" id="{B18E2FA7-3528-B5F6-DCC3-6380A3F928B8}"/>
-              </a:ext>
-            </a:extLst>
-          </p:cNvPr>
-          <p:cNvSpPr>
-            <a:spLocks noGrp="1"/>
-          </p:cNvSpPr>
-          <p:nvPr>
-            <p:ph type="title"/>
-          </p:nvPr>
-        </p:nvSpPr>
-        <p:spPr/>
-        <p:txBody>
-          <a:bodyPr/>
-          <a:lstStyle/>
-          <a:p>
-            <a:r>
-              <a:rPr lang="en-US" dirty="0"/>
-              <a:t>Initial Experiment </a:t>
-            </a:r>
-            <a:endParaRPr lang="en-AU" dirty="0"/>
-          </a:p>
-        </p:txBody>
-      </p:sp>
-      <p:pic>
-        <p:nvPicPr>
-          <p:cNvPr id="8" name="Content Placeholder 7">
-            <a:extLst>
-              <a:ext uri="{FF2B5EF4-FFF2-40B4-BE49-F238E27FC236}">
-                <a16:creationId xmlns:a16="http://schemas.microsoft.com/office/drawing/2014/main" id="{9EB8DF53-DD2A-7EC6-EEE9-2BA24FC5B165}"/>
-              </a:ext>
-            </a:extLst>
-          </p:cNvPr>
-          <p:cNvPicPr>
-            <a:picLocks noGrp="1" noChangeAspect="1"/>
-          </p:cNvPicPr>
-          <p:nvPr>
-            <p:ph idx="1"/>
-          </p:nvPr>
-        </p:nvPicPr>
-        <p:blipFill>
-          <a:blip r:embed="rId3">
-            <a:extLst>
-              <a:ext uri="{28A0092B-C50C-407E-A947-70E740481C1C}">
-                <a14:useLocalDpi xmlns:a14="http://schemas.microsoft.com/office/drawing/2010/main" val="0"/>
-              </a:ext>
-            </a:extLst>
-          </a:blip>
-          <a:stretch>
-            <a:fillRect/>
-          </a:stretch>
-        </p:blipFill>
-        <p:spPr>
-          <a:xfrm rot="16200000">
-            <a:off x="3759044" y="1270977"/>
-            <a:ext cx="4673912" cy="6231884"/>
-          </a:xfrm>
-          <a:prstGeom prst="rect">
-            <a:avLst/>
-          </a:prstGeom>
-        </p:spPr>
-      </p:pic>
-    </p:spTree>
-    <p:extLst>
-      <p:ext uri="{BB962C8B-B14F-4D97-AF65-F5344CB8AC3E}">
-        <p14:creationId xmlns:p14="http://schemas.microsoft.com/office/powerpoint/2010/main" val="161381395"/>
-      </p:ext>
-    </p:extLst>
-  </p:cSld>
-  <p:clrMapOvr>
-    <a:masterClrMapping/>
-  </p:clrMapOvr>
-</p:sld>
-</file>
-
-<file path=ppt/slides/slide19.xml><?xml version="1.0" encoding="utf-8"?>
-<p:sld xmlns:a="http://schemas.openxmlformats.org/drawingml/2006/main" xmlns:r="http://schemas.openxmlformats.org/officeDocument/2006/relationships" xmlns:p="http://schemas.openxmlformats.org/presentationml/2006/main">
-  <p:cSld>
-    <p:spTree>
-      <p:nvGrpSpPr>
-        <p:cNvPr id="1" name=""/>
-        <p:cNvGrpSpPr/>
-        <p:nvPr/>
-      </p:nvGrpSpPr>
-      <p:grpSpPr>
-        <a:xfrm>
-          <a:off x="0" y="0"/>
-          <a:ext cx="0" cy="0"/>
-          <a:chOff x="0" y="0"/>
-          <a:chExt cx="0" cy="0"/>
-        </a:xfrm>
-      </p:grpSpPr>
-      <p:sp>
-        <p:nvSpPr>
-          <p:cNvPr id="2" name="Title 1">
-            <a:extLst>
-              <a:ext uri="{FF2B5EF4-FFF2-40B4-BE49-F238E27FC236}">
-                <a16:creationId xmlns:a16="http://schemas.microsoft.com/office/drawing/2014/main" id="{1CB5020F-9C20-B7A9-E41A-55AAE3D5476A}"/>
-              </a:ext>
-            </a:extLst>
-          </p:cNvPr>
-          <p:cNvSpPr>
-            <a:spLocks noGrp="1"/>
-          </p:cNvSpPr>
-          <p:nvPr>
-            <p:ph type="title"/>
-          </p:nvPr>
-        </p:nvSpPr>
-        <p:spPr/>
-        <p:txBody>
-          <a:bodyPr/>
-          <a:lstStyle/>
-          <a:p>
-            <a:endParaRPr lang="en-AU"/>
-          </a:p>
-        </p:txBody>
-      </p:sp>
-      <p:sp>
-        <p:nvSpPr>
-          <p:cNvPr id="3" name="Content Placeholder 2">
-            <a:extLst>
-              <a:ext uri="{FF2B5EF4-FFF2-40B4-BE49-F238E27FC236}">
-                <a16:creationId xmlns:a16="http://schemas.microsoft.com/office/drawing/2014/main" id="{DEB5D11C-73B4-CF12-50B3-6C4805004ADA}"/>
-              </a:ext>
-            </a:extLst>
-          </p:cNvPr>
-          <p:cNvSpPr>
-            <a:spLocks noGrp="1"/>
-          </p:cNvSpPr>
-          <p:nvPr>
-            <p:ph idx="1"/>
-          </p:nvPr>
-        </p:nvSpPr>
-        <p:spPr/>
-        <p:txBody>
-          <a:bodyPr/>
-          <a:lstStyle/>
-          <a:p>
-            <a:endParaRPr lang="en-AU"/>
-          </a:p>
-        </p:txBody>
-      </p:sp>
-    </p:spTree>
-    <p:extLst>
-      <p:ext uri="{BB962C8B-B14F-4D97-AF65-F5344CB8AC3E}">
-        <p14:creationId xmlns:p14="http://schemas.microsoft.com/office/powerpoint/2010/main" val="553690055"/>
-      </p:ext>
-    </p:extLst>
-  </p:cSld>
-  <p:clrMapOvr>
-    <a:masterClrMapping/>
-  </p:clrMapOvr>
-</p:sld>
-</file>
-
-<file path=ppt/slides/slide2.xml><?xml version="1.0" encoding="utf-8"?>
-<p:sld xmlns:a="http://schemas.openxmlformats.org/drawingml/2006/main" xmlns:r="http://schemas.openxmlformats.org/officeDocument/2006/relationships" xmlns:p="http://schemas.openxmlformats.org/presentationml/2006/main">
-  <p:cSld>
-    <p:spTree>
-      <p:nvGrpSpPr>
-        <p:cNvPr id="1" name=""/>
-        <p:cNvGrpSpPr/>
-        <p:nvPr/>
-      </p:nvGrpSpPr>
-      <p:grpSpPr>
-        <a:xfrm>
-          <a:off x="0" y="0"/>
-          <a:ext cx="0" cy="0"/>
-          <a:chOff x="0" y="0"/>
-          <a:chExt cx="0" cy="0"/>
-        </a:xfrm>
-      </p:grpSpPr>
-      <p:sp>
-        <p:nvSpPr>
-          <p:cNvPr id="2" name="Title 1">
-            <a:extLst>
-              <a:ext uri="{FF2B5EF4-FFF2-40B4-BE49-F238E27FC236}">
-                <a16:creationId xmlns:a16="http://schemas.microsoft.com/office/drawing/2014/main" id="{53FEA34F-6776-B085-331E-74C0279DCB4D}"/>
-              </a:ext>
-            </a:extLst>
-          </p:cNvPr>
-          <p:cNvSpPr>
-            <a:spLocks noGrp="1"/>
-          </p:cNvSpPr>
-          <p:nvPr>
-            <p:ph type="title"/>
-          </p:nvPr>
-        </p:nvSpPr>
-        <p:spPr/>
-        <p:txBody>
-          <a:bodyPr/>
-          <a:lstStyle/>
-          <a:p>
-            <a:r>
-              <a:rPr lang="en-US" dirty="0"/>
-              <a:t>Chapter 1 </a:t>
-            </a:r>
-            <a:endParaRPr lang="en-AU" dirty="0"/>
-          </a:p>
-        </p:txBody>
-      </p:sp>
-      <p:sp>
-        <p:nvSpPr>
-          <p:cNvPr id="3" name="Content Placeholder 2">
-            <a:extLst>
-              <a:ext uri="{FF2B5EF4-FFF2-40B4-BE49-F238E27FC236}">
-                <a16:creationId xmlns:a16="http://schemas.microsoft.com/office/drawing/2014/main" id="{CA4F29F4-AEB2-D0FB-3CE6-20070AD29B70}"/>
-              </a:ext>
-            </a:extLst>
-          </p:cNvPr>
-          <p:cNvSpPr>
-            <a:spLocks noGrp="1"/>
-          </p:cNvSpPr>
-          <p:nvPr>
-            <p:ph idx="1"/>
-          </p:nvPr>
-        </p:nvSpPr>
-        <p:spPr/>
-        <p:txBody>
-          <a:bodyPr/>
-          <a:lstStyle/>
-          <a:p>
-            <a:r>
-              <a:rPr lang="en-US" dirty="0"/>
-              <a:t>Looking at the fitness effect of E. coli with </a:t>
-            </a:r>
-            <a:r>
-              <a:rPr lang="en-US" dirty="0" err="1"/>
-              <a:t>rpoB</a:t>
-            </a:r>
-            <a:r>
-              <a:rPr lang="en-US" dirty="0"/>
-              <a:t> mutations from our lab </a:t>
-            </a:r>
-          </a:p>
-          <a:p>
-            <a:r>
-              <a:rPr lang="en-US" dirty="0"/>
-              <a:t>Growing them across a wide temperature spectrum ideally from 22</a:t>
-            </a:r>
-            <a:r>
-              <a:rPr lang="en-AU" dirty="0"/>
-              <a:t>°c</a:t>
-            </a:r>
-            <a:r>
-              <a:rPr lang="en-US" dirty="0"/>
-              <a:t>-42</a:t>
-            </a:r>
-            <a:r>
-              <a:rPr lang="en-AU" dirty="0"/>
-              <a:t>°c</a:t>
-            </a:r>
-          </a:p>
-          <a:p>
-            <a:r>
-              <a:rPr lang="en-AU" dirty="0"/>
-              <a:t>Also across two types of media LB and M9 </a:t>
-            </a:r>
-            <a:endParaRPr lang="en-US" dirty="0"/>
-          </a:p>
-          <a:p>
-            <a:endParaRPr lang="en-US" dirty="0"/>
-          </a:p>
-          <a:p>
-            <a:endParaRPr lang="en-AU" dirty="0"/>
-          </a:p>
-        </p:txBody>
-      </p:sp>
-    </p:spTree>
-    <p:extLst>
-      <p:ext uri="{BB962C8B-B14F-4D97-AF65-F5344CB8AC3E}">
-        <p14:creationId xmlns:p14="http://schemas.microsoft.com/office/powerpoint/2010/main" val="2040666385"/>
       </p:ext>
     </p:extLst>
   </p:cSld>
@@ -7455,7 +7897,15 @@
           <a:p>
             <a:r>
               <a:rPr lang="en-US" dirty="0"/>
-              <a:t>I first tested the temperature ranges that we thought would be constitute as heat stress for E. coli (42</a:t>
+              <a:t>I first tested the temperature ranges that </a:t>
+            </a:r>
+            <a:r>
+              <a:rPr lang="en-AU" dirty="0"/>
+              <a:t>would constitute heat stress</a:t>
+            </a:r>
+            <a:r>
+              <a:rPr lang="en-US" dirty="0"/>
+              <a:t> heat stress for E. coli (42</a:t>
             </a:r>
             <a:r>
               <a:rPr lang="en-AU" dirty="0"/>
@@ -7873,7 +8323,7 @@
           <a:p>
             <a:r>
               <a:rPr lang="en-US" dirty="0"/>
-              <a:t>But we found out its between 26</a:t>
+              <a:t>But we found the temperature in the lab is between 26</a:t>
             </a:r>
             <a:r>
               <a:rPr lang="en-AU" dirty="0"/>
@@ -7881,7 +8331,7 @@
             </a:r>
             <a:r>
               <a:rPr lang="en-US" dirty="0"/>
-              <a:t>c -28</a:t>
+              <a:t>c - 28</a:t>
             </a:r>
             <a:r>
               <a:rPr lang="en-AU" dirty="0"/>
@@ -7889,7 +8339,7 @@
             </a:r>
             <a:r>
               <a:rPr lang="en-US" dirty="0"/>
-              <a:t>c in the lab</a:t>
+              <a:t>c</a:t>
             </a:r>
             <a:endParaRPr lang="en-AU" dirty="0"/>
           </a:p>
